--- a/.lessons/56 Category, Subcategory and Child Category Setup/14 Child Category- working with child category (part - 1)/1.pptx
+++ b/.lessons/56 Category, Subcategory and Child Category Setup/14 Child Category- working with child category (part - 1)/1.pptx
@@ -6,8 +6,25 @@
   </p:sldMasterIdLst>
   <p:sldIdLst>
     <p:sldId id="413" r:id="rId2"/>
-    <p:sldId id="414" r:id="rId3"/>
-    <p:sldId id="400" r:id="rId4"/>
+    <p:sldId id="415" r:id="rId3"/>
+    <p:sldId id="416" r:id="rId4"/>
+    <p:sldId id="417" r:id="rId5"/>
+    <p:sldId id="414" r:id="rId6"/>
+    <p:sldId id="418" r:id="rId7"/>
+    <p:sldId id="419" r:id="rId8"/>
+    <p:sldId id="420" r:id="rId9"/>
+    <p:sldId id="421" r:id="rId10"/>
+    <p:sldId id="424" r:id="rId11"/>
+    <p:sldId id="423" r:id="rId12"/>
+    <p:sldId id="426" r:id="rId13"/>
+    <p:sldId id="427" r:id="rId14"/>
+    <p:sldId id="425" r:id="rId15"/>
+    <p:sldId id="428" r:id="rId16"/>
+    <p:sldId id="429" r:id="rId17"/>
+    <p:sldId id="430" r:id="rId18"/>
+    <p:sldId id="422" r:id="rId19"/>
+    <p:sldId id="400" r:id="rId20"/>
+    <p:sldId id="431" r:id="rId21"/>
   </p:sldIdLst>
   <p:sldSz cx="12192000" cy="6858000"/>
   <p:notesSz cx="6858000" cy="9144000"/>
@@ -261,7 +278,7 @@
           <a:p>
             <a:fld id="{3E102D2E-813C-461C-9963-687A650C48C0}" type="datetimeFigureOut">
               <a:rPr lang="en-US" smtClean="0"/>
-              <a:t>6/26/2025</a:t>
+              <a:t>8/24/2025</a:t>
             </a:fld>
             <a:endParaRPr lang="en-US"/>
           </a:p>
@@ -459,7 +476,7 @@
           <a:p>
             <a:fld id="{3E102D2E-813C-461C-9963-687A650C48C0}" type="datetimeFigureOut">
               <a:rPr lang="en-US" smtClean="0"/>
-              <a:t>6/26/2025</a:t>
+              <a:t>8/24/2025</a:t>
             </a:fld>
             <a:endParaRPr lang="en-US"/>
           </a:p>
@@ -667,7 +684,7 @@
           <a:p>
             <a:fld id="{3E102D2E-813C-461C-9963-687A650C48C0}" type="datetimeFigureOut">
               <a:rPr lang="en-US" smtClean="0"/>
-              <a:t>6/26/2025</a:t>
+              <a:t>8/24/2025</a:t>
             </a:fld>
             <a:endParaRPr lang="en-US"/>
           </a:p>
@@ -865,7 +882,7 @@
           <a:p>
             <a:fld id="{3E102D2E-813C-461C-9963-687A650C48C0}" type="datetimeFigureOut">
               <a:rPr lang="en-US" smtClean="0"/>
-              <a:t>6/26/2025</a:t>
+              <a:t>8/24/2025</a:t>
             </a:fld>
             <a:endParaRPr lang="en-US"/>
           </a:p>
@@ -1140,7 +1157,7 @@
           <a:p>
             <a:fld id="{3E102D2E-813C-461C-9963-687A650C48C0}" type="datetimeFigureOut">
               <a:rPr lang="en-US" smtClean="0"/>
-              <a:t>6/26/2025</a:t>
+              <a:t>8/24/2025</a:t>
             </a:fld>
             <a:endParaRPr lang="en-US"/>
           </a:p>
@@ -1405,7 +1422,7 @@
           <a:p>
             <a:fld id="{3E102D2E-813C-461C-9963-687A650C48C0}" type="datetimeFigureOut">
               <a:rPr lang="en-US" smtClean="0"/>
-              <a:t>6/26/2025</a:t>
+              <a:t>8/24/2025</a:t>
             </a:fld>
             <a:endParaRPr lang="en-US"/>
           </a:p>
@@ -1817,7 +1834,7 @@
           <a:p>
             <a:fld id="{3E102D2E-813C-461C-9963-687A650C48C0}" type="datetimeFigureOut">
               <a:rPr lang="en-US" smtClean="0"/>
-              <a:t>6/26/2025</a:t>
+              <a:t>8/24/2025</a:t>
             </a:fld>
             <a:endParaRPr lang="en-US"/>
           </a:p>
@@ -1958,7 +1975,7 @@
           <a:p>
             <a:fld id="{3E102D2E-813C-461C-9963-687A650C48C0}" type="datetimeFigureOut">
               <a:rPr lang="en-US" smtClean="0"/>
-              <a:t>6/26/2025</a:t>
+              <a:t>8/24/2025</a:t>
             </a:fld>
             <a:endParaRPr lang="en-US"/>
           </a:p>
@@ -2071,7 +2088,7 @@
           <a:p>
             <a:fld id="{3E102D2E-813C-461C-9963-687A650C48C0}" type="datetimeFigureOut">
               <a:rPr lang="en-US" smtClean="0"/>
-              <a:t>6/26/2025</a:t>
+              <a:t>8/24/2025</a:t>
             </a:fld>
             <a:endParaRPr lang="en-US"/>
           </a:p>
@@ -2382,7 +2399,7 @@
           <a:p>
             <a:fld id="{3E102D2E-813C-461C-9963-687A650C48C0}" type="datetimeFigureOut">
               <a:rPr lang="en-US" smtClean="0"/>
-              <a:t>6/26/2025</a:t>
+              <a:t>8/24/2025</a:t>
             </a:fld>
             <a:endParaRPr lang="en-US"/>
           </a:p>
@@ -2670,7 +2687,7 @@
           <a:p>
             <a:fld id="{3E102D2E-813C-461C-9963-687A650C48C0}" type="datetimeFigureOut">
               <a:rPr lang="en-US" smtClean="0"/>
-              <a:t>6/26/2025</a:t>
+              <a:t>8/24/2025</a:t>
             </a:fld>
             <a:endParaRPr lang="en-US"/>
           </a:p>
@@ -2911,7 +2928,7 @@
           <a:p>
             <a:fld id="{3E102D2E-813C-461C-9963-687A650C48C0}" type="datetimeFigureOut">
               <a:rPr lang="en-US" smtClean="0"/>
-              <a:t>6/26/2025</a:t>
+              <a:t>8/24/2025</a:t>
             </a:fld>
             <a:endParaRPr lang="en-US"/>
           </a:p>
@@ -3384,6 +3401,36 @@
           </a:p>
         </p:txBody>
       </p:sp>
+      <p:pic>
+        <p:nvPicPr>
+          <p:cNvPr id="6" name="Picture 5">
+            <a:extLst>
+              <a:ext uri="{FF2B5EF4-FFF2-40B4-BE49-F238E27FC236}">
+                <a16:creationId xmlns:a16="http://schemas.microsoft.com/office/drawing/2014/main" id="{23D30FDC-C84E-E14F-13C9-0D528A95213D}"/>
+              </a:ext>
+            </a:extLst>
+          </p:cNvPr>
+          <p:cNvPicPr>
+            <a:picLocks noChangeAspect="1"/>
+          </p:cNvPicPr>
+          <p:nvPr/>
+        </p:nvPicPr>
+        <p:blipFill>
+          <a:blip r:embed="rId2"/>
+          <a:stretch>
+            <a:fillRect/>
+          </a:stretch>
+        </p:blipFill>
+        <p:spPr>
+          <a:xfrm>
+            <a:off x="1817827" y="4038206"/>
+            <a:ext cx="10374173" cy="2819794"/>
+          </a:xfrm>
+          <a:prstGeom prst="rect">
+            <a:avLst/>
+          </a:prstGeom>
+        </p:spPr>
+      </p:pic>
     </p:spTree>
     <p:extLst>
       <p:ext uri="{BB962C8B-B14F-4D97-AF65-F5344CB8AC3E}">
@@ -3397,7 +3444,2353 @@
 </p:sld>
 </file>
 
+<file path=ppt/slides/slide10.xml><?xml version="1.0" encoding="utf-8"?>
+<p:sld xmlns:a="http://schemas.openxmlformats.org/drawingml/2006/main" xmlns:r="http://schemas.openxmlformats.org/officeDocument/2006/relationships" xmlns:p="http://schemas.openxmlformats.org/presentationml/2006/main">
+  <p:cSld>
+    <p:spTree>
+      <p:nvGrpSpPr>
+        <p:cNvPr id="1" name="">
+          <a:extLst>
+            <a:ext uri="{FF2B5EF4-FFF2-40B4-BE49-F238E27FC236}">
+              <a16:creationId xmlns:a16="http://schemas.microsoft.com/office/drawing/2014/main" id="{FCCA7315-C3A4-F284-FDEC-EAC9D524DA43}"/>
+            </a:ext>
+          </a:extLst>
+        </p:cNvPr>
+        <p:cNvGrpSpPr/>
+        <p:nvPr/>
+      </p:nvGrpSpPr>
+      <p:grpSpPr>
+        <a:xfrm>
+          <a:off x="0" y="0"/>
+          <a:ext cx="0" cy="0"/>
+          <a:chOff x="0" y="0"/>
+          <a:chExt cx="0" cy="0"/>
+        </a:xfrm>
+      </p:grpSpPr>
+      <p:sp>
+        <p:nvSpPr>
+          <p:cNvPr id="3" name="TextBox 2">
+            <a:extLst>
+              <a:ext uri="{FF2B5EF4-FFF2-40B4-BE49-F238E27FC236}">
+                <a16:creationId xmlns:a16="http://schemas.microsoft.com/office/drawing/2014/main" id="{02FE50B6-4982-E707-22DA-D3D1DCEEB1BF}"/>
+              </a:ext>
+            </a:extLst>
+          </p:cNvPr>
+          <p:cNvSpPr txBox="1"/>
+          <p:nvPr/>
+        </p:nvSpPr>
+        <p:spPr>
+          <a:xfrm>
+            <a:off x="1" y="171918"/>
+            <a:ext cx="6221655" cy="3105145"/>
+          </a:xfrm>
+          <a:prstGeom prst="rect">
+            <a:avLst/>
+          </a:prstGeom>
+          <a:noFill/>
+        </p:spPr>
+        <p:txBody>
+          <a:bodyPr wrap="square">
+            <a:spAutoFit/>
+          </a:bodyPr>
+          <a:lstStyle/>
+          <a:p>
+            <a:pPr>
+              <a:lnSpc>
+                <a:spcPct val="150000"/>
+              </a:lnSpc>
+              <a:buNone/>
+            </a:pPr>
+            <a:r>
+              <a:rPr lang="en-US" altLang="en-US" sz="1200">
+                <a:latin typeface="Arial" panose="020B0604020202020204" pitchFamily="34" charset="0"/>
+              </a:rPr>
+              <a:t>resources\views\admin\child-category\create.blade.php</a:t>
+            </a:r>
+            <a:endParaRPr lang="az-Latn-AZ" altLang="en-US" sz="1200">
+              <a:latin typeface="Arial" panose="020B0604020202020204" pitchFamily="34" charset="0"/>
+            </a:endParaRPr>
+          </a:p>
+          <a:p>
+            <a:pPr>
+              <a:lnSpc>
+                <a:spcPct val="150000"/>
+              </a:lnSpc>
+              <a:buNone/>
+            </a:pPr>
+            <a:endParaRPr lang="az-Latn-AZ" altLang="en-US" sz="1200">
+              <a:latin typeface="Arial" panose="020B0604020202020204" pitchFamily="34" charset="0"/>
+            </a:endParaRPr>
+          </a:p>
+          <a:p>
+            <a:pPr>
+              <a:lnSpc>
+                <a:spcPct val="150000"/>
+              </a:lnSpc>
+              <a:buNone/>
+            </a:pPr>
+            <a:r>
+              <a:rPr lang="en-US" altLang="en-US" sz="1200" b="1">
+                <a:latin typeface="Arial" panose="020B0604020202020204" pitchFamily="34" charset="0"/>
+              </a:rPr>
+              <a:t>Category </a:t>
+            </a:r>
+            <a:r>
+              <a:rPr lang="az-Latn-AZ" altLang="en-US" sz="1200" b="1">
+                <a:latin typeface="Arial" panose="020B0604020202020204" pitchFamily="34" charset="0"/>
+              </a:rPr>
+              <a:t>select</a:t>
+            </a:r>
+            <a:r>
+              <a:rPr lang="az-Latn-AZ" altLang="en-US" sz="1200">
+                <a:latin typeface="Arial" panose="020B0604020202020204" pitchFamily="34" charset="0"/>
+              </a:rPr>
+              <a:t> elementi </a:t>
+            </a:r>
+            <a:r>
+              <a:rPr lang="az-Latn-AZ" altLang="en-US" sz="1200" b="1">
+                <a:latin typeface="Arial" panose="020B0604020202020204" pitchFamily="34" charset="0"/>
+              </a:rPr>
+              <a:t>change</a:t>
+            </a:r>
+            <a:r>
+              <a:rPr lang="az-Latn-AZ" altLang="en-US" sz="1200">
+                <a:latin typeface="Arial" panose="020B0604020202020204" pitchFamily="34" charset="0"/>
+              </a:rPr>
+              <a:t> olduqda həmin elementin </a:t>
+            </a:r>
+            <a:r>
+              <a:rPr lang="az-Latn-AZ" altLang="en-US" sz="1200" b="1">
+                <a:latin typeface="Arial" panose="020B0604020202020204" pitchFamily="34" charset="0"/>
+              </a:rPr>
+              <a:t>identifikatoru</a:t>
+            </a:r>
+            <a:r>
+              <a:rPr lang="en-US" altLang="en-US" sz="1200" b="1">
+                <a:latin typeface="Arial" panose="020B0604020202020204" pitchFamily="34" charset="0"/>
+              </a:rPr>
+              <a:t> </a:t>
+            </a:r>
+          </a:p>
+          <a:p>
+            <a:pPr>
+              <a:lnSpc>
+                <a:spcPct val="150000"/>
+              </a:lnSpc>
+              <a:buNone/>
+            </a:pPr>
+            <a:r>
+              <a:rPr lang="az-Latn-AZ" altLang="en-US" sz="1200" b="1">
+                <a:latin typeface="Arial" panose="020B0604020202020204" pitchFamily="34" charset="0"/>
+              </a:rPr>
+              <a:t>get</a:t>
+            </a:r>
+            <a:r>
+              <a:rPr lang="az-Latn-AZ" altLang="en-US" sz="1200">
+                <a:latin typeface="Arial" panose="020B0604020202020204" pitchFamily="34" charset="0"/>
+              </a:rPr>
+              <a:t> sorğu ilə əldə edilir.</a:t>
+            </a:r>
+          </a:p>
+          <a:p>
+            <a:pPr>
+              <a:lnSpc>
+                <a:spcPct val="150000"/>
+              </a:lnSpc>
+              <a:buNone/>
+            </a:pPr>
+            <a:endParaRPr lang="az-Latn-AZ" altLang="en-US" sz="1200">
+              <a:latin typeface="Arial" panose="020B0604020202020204" pitchFamily="34" charset="0"/>
+            </a:endParaRPr>
+          </a:p>
+          <a:p>
+            <a:pPr>
+              <a:lnSpc>
+                <a:spcPct val="150000"/>
+              </a:lnSpc>
+              <a:buNone/>
+            </a:pPr>
+            <a:endParaRPr lang="az-Latn-AZ" altLang="en-US" sz="1200">
+              <a:latin typeface="Arial" panose="020B0604020202020204" pitchFamily="34" charset="0"/>
+            </a:endParaRPr>
+          </a:p>
+          <a:p>
+            <a:pPr>
+              <a:lnSpc>
+                <a:spcPct val="150000"/>
+              </a:lnSpc>
+              <a:buNone/>
+            </a:pPr>
+            <a:endParaRPr lang="az-Latn-AZ" altLang="en-US" sz="1200">
+              <a:latin typeface="Arial" panose="020B0604020202020204" pitchFamily="34" charset="0"/>
+            </a:endParaRPr>
+          </a:p>
+          <a:p>
+            <a:pPr>
+              <a:lnSpc>
+                <a:spcPct val="150000"/>
+              </a:lnSpc>
+              <a:buNone/>
+            </a:pPr>
+            <a:r>
+              <a:rPr lang="az-Latn-AZ" altLang="en-US" sz="1200" b="1">
+                <a:latin typeface="Arial" panose="020B0604020202020204" pitchFamily="34" charset="0"/>
+              </a:rPr>
+              <a:t>Gedən</a:t>
+            </a:r>
+            <a:r>
+              <a:rPr lang="az-Latn-AZ" altLang="en-US" sz="1200">
+                <a:latin typeface="Arial" panose="020B0604020202020204" pitchFamily="34" charset="0"/>
+              </a:rPr>
+              <a:t> və </a:t>
+            </a:r>
+            <a:r>
+              <a:rPr lang="az-Latn-AZ" altLang="en-US" sz="1200" b="1">
+                <a:latin typeface="Arial" panose="020B0604020202020204" pitchFamily="34" charset="0"/>
+              </a:rPr>
+              <a:t>Gələn</a:t>
+            </a:r>
+            <a:r>
+              <a:rPr lang="az-Latn-AZ" altLang="en-US" sz="1200">
+                <a:latin typeface="Arial" panose="020B0604020202020204" pitchFamily="34" charset="0"/>
+              </a:rPr>
+              <a:t> sorğuları </a:t>
+            </a:r>
+            <a:r>
+              <a:rPr lang="en-US" altLang="en-US" sz="1200" b="1">
+                <a:latin typeface="Arial" panose="020B0604020202020204" pitchFamily="34" charset="0"/>
+              </a:rPr>
+              <a:t>Network</a:t>
+            </a:r>
+            <a:r>
+              <a:rPr lang="en-US" altLang="en-US" sz="1200">
+                <a:latin typeface="Arial" panose="020B0604020202020204" pitchFamily="34" charset="0"/>
+              </a:rPr>
+              <a:t> </a:t>
+            </a:r>
+            <a:r>
+              <a:rPr lang="az-Latn-AZ" altLang="en-US" sz="1200">
+                <a:latin typeface="Arial" panose="020B0604020202020204" pitchFamily="34" charset="0"/>
+              </a:rPr>
+              <a:t>bölməsindən görə bilərik.</a:t>
+            </a:r>
+          </a:p>
+          <a:p>
+            <a:pPr>
+              <a:lnSpc>
+                <a:spcPct val="150000"/>
+              </a:lnSpc>
+              <a:buNone/>
+            </a:pPr>
+            <a:r>
+              <a:rPr lang="az-Latn-AZ" altLang="en-US" sz="1200">
+                <a:latin typeface="Arial" panose="020B0604020202020204" pitchFamily="34" charset="0"/>
+              </a:rPr>
+              <a:t>Əldə etdiyimiz </a:t>
+            </a:r>
+            <a:r>
+              <a:rPr lang="az-Latn-AZ" altLang="en-US" sz="1200" b="1">
+                <a:latin typeface="Arial" panose="020B0604020202020204" pitchFamily="34" charset="0"/>
+              </a:rPr>
+              <a:t>identifikatoru</a:t>
+            </a:r>
+            <a:r>
+              <a:rPr lang="az-Latn-AZ" altLang="en-US" sz="1200">
+                <a:latin typeface="Arial" panose="020B0604020202020204" pitchFamily="34" charset="0"/>
+              </a:rPr>
+              <a:t> yeni </a:t>
+            </a:r>
+            <a:r>
+              <a:rPr lang="az-Latn-AZ" altLang="en-US" sz="1200" b="1">
+                <a:latin typeface="Arial" panose="020B0604020202020204" pitchFamily="34" charset="0"/>
+              </a:rPr>
+              <a:t>route</a:t>
+            </a:r>
+            <a:r>
+              <a:rPr lang="az-Latn-AZ" altLang="en-US" sz="1200">
+                <a:latin typeface="Arial" panose="020B0604020202020204" pitchFamily="34" charset="0"/>
+              </a:rPr>
+              <a:t> yaradaraq həmin </a:t>
+            </a:r>
+            <a:r>
+              <a:rPr lang="az-Latn-AZ" altLang="en-US" sz="1200" b="1">
+                <a:latin typeface="Arial" panose="020B0604020202020204" pitchFamily="34" charset="0"/>
+              </a:rPr>
+              <a:t>route</a:t>
+            </a:r>
+            <a:r>
+              <a:rPr lang="az-Latn-AZ" altLang="en-US" sz="1200">
+                <a:latin typeface="Arial" panose="020B0604020202020204" pitchFamily="34" charset="0"/>
+              </a:rPr>
+              <a:t> ilə bu kontrollerə göndərəcəyik: </a:t>
+            </a:r>
+            <a:r>
+              <a:rPr lang="az-Latn-AZ" altLang="en-US" sz="1200" b="1">
+                <a:latin typeface="Arial" panose="020B0604020202020204" pitchFamily="34" charset="0"/>
+              </a:rPr>
+              <a:t>app\Http\Controllers\Backend\</a:t>
+            </a:r>
+            <a:r>
+              <a:rPr lang="az-Latn-AZ" altLang="en-US" sz="1200" b="1" u="sng">
+                <a:latin typeface="Arial" panose="020B0604020202020204" pitchFamily="34" charset="0"/>
+              </a:rPr>
+              <a:t>ChildCategoryController.php</a:t>
+            </a:r>
+          </a:p>
+          <a:p>
+            <a:pPr>
+              <a:lnSpc>
+                <a:spcPct val="150000"/>
+              </a:lnSpc>
+              <a:buNone/>
+            </a:pPr>
+            <a:endParaRPr lang="en-US" altLang="en-US" sz="1200">
+              <a:latin typeface="Arial" panose="020B0604020202020204" pitchFamily="34" charset="0"/>
+            </a:endParaRPr>
+          </a:p>
+        </p:txBody>
+      </p:sp>
+      <p:pic>
+        <p:nvPicPr>
+          <p:cNvPr id="4" name="Picture 3">
+            <a:extLst>
+              <a:ext uri="{FF2B5EF4-FFF2-40B4-BE49-F238E27FC236}">
+                <a16:creationId xmlns:a16="http://schemas.microsoft.com/office/drawing/2014/main" id="{8A78AF42-A786-B58B-7760-55C4E521F15C}"/>
+              </a:ext>
+            </a:extLst>
+          </p:cNvPr>
+          <p:cNvPicPr>
+            <a:picLocks noChangeAspect="1"/>
+          </p:cNvPicPr>
+          <p:nvPr/>
+        </p:nvPicPr>
+        <p:blipFill>
+          <a:blip r:embed="rId2"/>
+          <a:srcRect r="10148"/>
+          <a:stretch>
+            <a:fillRect/>
+          </a:stretch>
+        </p:blipFill>
+        <p:spPr>
+          <a:xfrm>
+            <a:off x="6221657" y="0"/>
+            <a:ext cx="5970341" cy="6857999"/>
+          </a:xfrm>
+          <a:prstGeom prst="rect">
+            <a:avLst/>
+          </a:prstGeom>
+        </p:spPr>
+      </p:pic>
+      <p:pic>
+        <p:nvPicPr>
+          <p:cNvPr id="7" name="Picture 6">
+            <a:extLst>
+              <a:ext uri="{FF2B5EF4-FFF2-40B4-BE49-F238E27FC236}">
+                <a16:creationId xmlns:a16="http://schemas.microsoft.com/office/drawing/2014/main" id="{FBC23AA1-3E86-9E82-5B88-E4118EB6DC86}"/>
+              </a:ext>
+            </a:extLst>
+          </p:cNvPr>
+          <p:cNvPicPr>
+            <a:picLocks noChangeAspect="1"/>
+          </p:cNvPicPr>
+          <p:nvPr/>
+        </p:nvPicPr>
+        <p:blipFill>
+          <a:blip r:embed="rId3"/>
+          <a:stretch>
+            <a:fillRect/>
+          </a:stretch>
+        </p:blipFill>
+        <p:spPr>
+          <a:xfrm>
+            <a:off x="0" y="3171983"/>
+            <a:ext cx="4453072" cy="3686016"/>
+          </a:xfrm>
+          <a:prstGeom prst="rect">
+            <a:avLst/>
+          </a:prstGeom>
+          <a:ln w="38100" cap="sq">
+            <a:solidFill>
+              <a:srgbClr val="000000"/>
+            </a:solidFill>
+            <a:prstDash val="solid"/>
+            <a:miter lim="800000"/>
+          </a:ln>
+          <a:effectLst>
+            <a:outerShdw blurRad="50800" dist="38100" dir="2700000" algn="tl" rotWithShape="0">
+              <a:srgbClr val="000000">
+                <a:alpha val="43000"/>
+              </a:srgbClr>
+            </a:outerShdw>
+          </a:effectLst>
+        </p:spPr>
+      </p:pic>
+    </p:spTree>
+    <p:extLst>
+      <p:ext uri="{BB962C8B-B14F-4D97-AF65-F5344CB8AC3E}">
+        <p14:creationId xmlns:p14="http://schemas.microsoft.com/office/powerpoint/2010/main" val="3502912928"/>
+      </p:ext>
+    </p:extLst>
+  </p:cSld>
+  <p:clrMapOvr>
+    <a:masterClrMapping/>
+  </p:clrMapOvr>
+</p:sld>
+</file>
+
+<file path=ppt/slides/slide11.xml><?xml version="1.0" encoding="utf-8"?>
+<p:sld xmlns:a="http://schemas.openxmlformats.org/drawingml/2006/main" xmlns:r="http://schemas.openxmlformats.org/officeDocument/2006/relationships" xmlns:p="http://schemas.openxmlformats.org/presentationml/2006/main">
+  <p:cSld>
+    <p:spTree>
+      <p:nvGrpSpPr>
+        <p:cNvPr id="1" name="">
+          <a:extLst>
+            <a:ext uri="{FF2B5EF4-FFF2-40B4-BE49-F238E27FC236}">
+              <a16:creationId xmlns:a16="http://schemas.microsoft.com/office/drawing/2014/main" id="{01093F16-CD9C-E9C0-B81F-912DF17837A9}"/>
+            </a:ext>
+          </a:extLst>
+        </p:cNvPr>
+        <p:cNvGrpSpPr/>
+        <p:nvPr/>
+      </p:nvGrpSpPr>
+      <p:grpSpPr>
+        <a:xfrm>
+          <a:off x="0" y="0"/>
+          <a:ext cx="0" cy="0"/>
+          <a:chOff x="0" y="0"/>
+          <a:chExt cx="0" cy="0"/>
+        </a:xfrm>
+      </p:grpSpPr>
+      <p:sp>
+        <p:nvSpPr>
+          <p:cNvPr id="3" name="TextBox 2">
+            <a:extLst>
+              <a:ext uri="{FF2B5EF4-FFF2-40B4-BE49-F238E27FC236}">
+                <a16:creationId xmlns:a16="http://schemas.microsoft.com/office/drawing/2014/main" id="{B928CFC8-4643-160D-8A9C-9DBFE4EAE174}"/>
+              </a:ext>
+            </a:extLst>
+          </p:cNvPr>
+          <p:cNvSpPr txBox="1"/>
+          <p:nvPr/>
+        </p:nvSpPr>
+        <p:spPr>
+          <a:xfrm>
+            <a:off x="217714" y="255046"/>
+            <a:ext cx="11756571" cy="355354"/>
+          </a:xfrm>
+          <a:prstGeom prst="rect">
+            <a:avLst/>
+          </a:prstGeom>
+          <a:noFill/>
+        </p:spPr>
+        <p:txBody>
+          <a:bodyPr wrap="square">
+            <a:spAutoFit/>
+          </a:bodyPr>
+          <a:lstStyle/>
+          <a:p>
+            <a:pPr>
+              <a:lnSpc>
+                <a:spcPct val="150000"/>
+              </a:lnSpc>
+              <a:buNone/>
+            </a:pPr>
+            <a:r>
+              <a:rPr lang="az-Latn-AZ" altLang="en-US" sz="1300">
+                <a:latin typeface="Arial" panose="020B0604020202020204" pitchFamily="34" charset="0"/>
+              </a:rPr>
+              <a:t>route -u yaradırıq.</a:t>
+            </a:r>
+            <a:endParaRPr kumimoji="0" lang="en-US" altLang="en-US" sz="1300" b="0" i="0" u="none" strike="noStrike" cap="none" normalizeH="0" baseline="0">
+              <a:ln>
+                <a:noFill/>
+              </a:ln>
+              <a:solidFill>
+                <a:schemeClr val="tx1"/>
+              </a:solidFill>
+              <a:effectLst/>
+              <a:latin typeface="Arial" panose="020B0604020202020204" pitchFamily="34" charset="0"/>
+            </a:endParaRPr>
+          </a:p>
+        </p:txBody>
+      </p:sp>
+      <p:pic>
+        <p:nvPicPr>
+          <p:cNvPr id="6" name="Picture 5">
+            <a:extLst>
+              <a:ext uri="{FF2B5EF4-FFF2-40B4-BE49-F238E27FC236}">
+                <a16:creationId xmlns:a16="http://schemas.microsoft.com/office/drawing/2014/main" id="{9ABA0FD8-CBFF-AB52-B8B2-FF355D7F7EA1}"/>
+              </a:ext>
+            </a:extLst>
+          </p:cNvPr>
+          <p:cNvPicPr>
+            <a:picLocks noChangeAspect="1"/>
+          </p:cNvPicPr>
+          <p:nvPr/>
+        </p:nvPicPr>
+        <p:blipFill>
+          <a:blip r:embed="rId2"/>
+          <a:stretch>
+            <a:fillRect/>
+          </a:stretch>
+        </p:blipFill>
+        <p:spPr>
+          <a:xfrm>
+            <a:off x="3482339" y="0"/>
+            <a:ext cx="8709661" cy="6858000"/>
+          </a:xfrm>
+          <a:prstGeom prst="rect">
+            <a:avLst/>
+          </a:prstGeom>
+        </p:spPr>
+      </p:pic>
+    </p:spTree>
+    <p:extLst>
+      <p:ext uri="{BB962C8B-B14F-4D97-AF65-F5344CB8AC3E}">
+        <p14:creationId xmlns:p14="http://schemas.microsoft.com/office/powerpoint/2010/main" val="1324897869"/>
+      </p:ext>
+    </p:extLst>
+  </p:cSld>
+  <p:clrMapOvr>
+    <a:masterClrMapping/>
+  </p:clrMapOvr>
+</p:sld>
+</file>
+
+<file path=ppt/slides/slide12.xml><?xml version="1.0" encoding="utf-8"?>
+<p:sld xmlns:a="http://schemas.openxmlformats.org/drawingml/2006/main" xmlns:r="http://schemas.openxmlformats.org/officeDocument/2006/relationships" xmlns:p="http://schemas.openxmlformats.org/presentationml/2006/main">
+  <p:cSld>
+    <p:spTree>
+      <p:nvGrpSpPr>
+        <p:cNvPr id="1" name="">
+          <a:extLst>
+            <a:ext uri="{FF2B5EF4-FFF2-40B4-BE49-F238E27FC236}">
+              <a16:creationId xmlns:a16="http://schemas.microsoft.com/office/drawing/2014/main" id="{6C36F097-EC2A-48E4-D22F-C4844724F274}"/>
+            </a:ext>
+          </a:extLst>
+        </p:cNvPr>
+        <p:cNvGrpSpPr/>
+        <p:nvPr/>
+      </p:nvGrpSpPr>
+      <p:grpSpPr>
+        <a:xfrm>
+          <a:off x="0" y="0"/>
+          <a:ext cx="0" cy="0"/>
+          <a:chOff x="0" y="0"/>
+          <a:chExt cx="0" cy="0"/>
+        </a:xfrm>
+      </p:grpSpPr>
+      <p:sp>
+        <p:nvSpPr>
+          <p:cNvPr id="3" name="TextBox 2">
+            <a:extLst>
+              <a:ext uri="{FF2B5EF4-FFF2-40B4-BE49-F238E27FC236}">
+                <a16:creationId xmlns:a16="http://schemas.microsoft.com/office/drawing/2014/main" id="{099D90BC-12B1-303E-5693-9CCCB57CA5F0}"/>
+              </a:ext>
+            </a:extLst>
+          </p:cNvPr>
+          <p:cNvSpPr txBox="1"/>
+          <p:nvPr/>
+        </p:nvSpPr>
+        <p:spPr>
+          <a:xfrm>
+            <a:off x="217714" y="255046"/>
+            <a:ext cx="11756571" cy="355354"/>
+          </a:xfrm>
+          <a:prstGeom prst="rect">
+            <a:avLst/>
+          </a:prstGeom>
+          <a:noFill/>
+        </p:spPr>
+        <p:txBody>
+          <a:bodyPr wrap="square">
+            <a:spAutoFit/>
+          </a:bodyPr>
+          <a:lstStyle/>
+          <a:p>
+            <a:pPr>
+              <a:lnSpc>
+                <a:spcPct val="150000"/>
+              </a:lnSpc>
+              <a:buNone/>
+            </a:pPr>
+            <a:r>
+              <a:rPr lang="en-US" altLang="en-US" sz="1300" b="1">
+                <a:latin typeface="Arial" panose="020B0604020202020204" pitchFamily="34" charset="0"/>
+              </a:rPr>
+              <a:t>route</a:t>
+            </a:r>
+            <a:r>
+              <a:rPr lang="en-US" altLang="en-US" sz="1300">
+                <a:latin typeface="Arial" panose="020B0604020202020204" pitchFamily="34" charset="0"/>
+              </a:rPr>
+              <a:t> -u </a:t>
+            </a:r>
+            <a:r>
+              <a:rPr lang="az-Latn-AZ" altLang="en-US" sz="1300">
+                <a:latin typeface="Arial" panose="020B0604020202020204" pitchFamily="34" charset="0"/>
+              </a:rPr>
+              <a:t>əlavə edirik.</a:t>
+            </a:r>
+            <a:endParaRPr kumimoji="0" lang="en-US" altLang="en-US" sz="1300" b="0" i="0" u="none" strike="noStrike" cap="none" normalizeH="0" baseline="0">
+              <a:ln>
+                <a:noFill/>
+              </a:ln>
+              <a:solidFill>
+                <a:schemeClr val="tx1"/>
+              </a:solidFill>
+              <a:effectLst/>
+              <a:latin typeface="Arial" panose="020B0604020202020204" pitchFamily="34" charset="0"/>
+            </a:endParaRPr>
+          </a:p>
+        </p:txBody>
+      </p:sp>
+      <p:pic>
+        <p:nvPicPr>
+          <p:cNvPr id="4" name="Picture 3">
+            <a:extLst>
+              <a:ext uri="{FF2B5EF4-FFF2-40B4-BE49-F238E27FC236}">
+                <a16:creationId xmlns:a16="http://schemas.microsoft.com/office/drawing/2014/main" id="{31CC32D1-5D73-561A-A5AA-2D7F0DCBF362}"/>
+              </a:ext>
+            </a:extLst>
+          </p:cNvPr>
+          <p:cNvPicPr>
+            <a:picLocks noChangeAspect="1"/>
+          </p:cNvPicPr>
+          <p:nvPr/>
+        </p:nvPicPr>
+        <p:blipFill>
+          <a:blip r:embed="rId2"/>
+          <a:stretch>
+            <a:fillRect/>
+          </a:stretch>
+        </p:blipFill>
+        <p:spPr>
+          <a:xfrm>
+            <a:off x="6095999" y="0"/>
+            <a:ext cx="6068521" cy="6858000"/>
+          </a:xfrm>
+          <a:prstGeom prst="rect">
+            <a:avLst/>
+          </a:prstGeom>
+        </p:spPr>
+      </p:pic>
+    </p:spTree>
+    <p:extLst>
+      <p:ext uri="{BB962C8B-B14F-4D97-AF65-F5344CB8AC3E}">
+        <p14:creationId xmlns:p14="http://schemas.microsoft.com/office/powerpoint/2010/main" val="1410694793"/>
+      </p:ext>
+    </p:extLst>
+  </p:cSld>
+  <p:clrMapOvr>
+    <a:masterClrMapping/>
+  </p:clrMapOvr>
+</p:sld>
+</file>
+
+<file path=ppt/slides/slide13.xml><?xml version="1.0" encoding="utf-8"?>
+<p:sld xmlns:a="http://schemas.openxmlformats.org/drawingml/2006/main" xmlns:r="http://schemas.openxmlformats.org/officeDocument/2006/relationships" xmlns:p="http://schemas.openxmlformats.org/presentationml/2006/main">
+  <p:cSld>
+    <p:spTree>
+      <p:nvGrpSpPr>
+        <p:cNvPr id="1" name="">
+          <a:extLst>
+            <a:ext uri="{FF2B5EF4-FFF2-40B4-BE49-F238E27FC236}">
+              <a16:creationId xmlns:a16="http://schemas.microsoft.com/office/drawing/2014/main" id="{1BA06538-4710-2CAC-0CC3-4E65D9E29061}"/>
+            </a:ext>
+          </a:extLst>
+        </p:cNvPr>
+        <p:cNvGrpSpPr/>
+        <p:nvPr/>
+      </p:nvGrpSpPr>
+      <p:grpSpPr>
+        <a:xfrm>
+          <a:off x="0" y="0"/>
+          <a:ext cx="0" cy="0"/>
+          <a:chOff x="0" y="0"/>
+          <a:chExt cx="0" cy="0"/>
+        </a:xfrm>
+      </p:grpSpPr>
+      <p:sp>
+        <p:nvSpPr>
+          <p:cNvPr id="3" name="TextBox 2">
+            <a:extLst>
+              <a:ext uri="{FF2B5EF4-FFF2-40B4-BE49-F238E27FC236}">
+                <a16:creationId xmlns:a16="http://schemas.microsoft.com/office/drawing/2014/main" id="{D7710F35-9E53-022F-30E0-D52B2FA31EC0}"/>
+              </a:ext>
+            </a:extLst>
+          </p:cNvPr>
+          <p:cNvSpPr txBox="1"/>
+          <p:nvPr/>
+        </p:nvSpPr>
+        <p:spPr>
+          <a:xfrm>
+            <a:off x="108857" y="171918"/>
+            <a:ext cx="11974286" cy="655436"/>
+          </a:xfrm>
+          <a:prstGeom prst="rect">
+            <a:avLst/>
+          </a:prstGeom>
+          <a:noFill/>
+        </p:spPr>
+        <p:txBody>
+          <a:bodyPr wrap="square">
+            <a:spAutoFit/>
+          </a:bodyPr>
+          <a:lstStyle/>
+          <a:p>
+            <a:pPr>
+              <a:lnSpc>
+                <a:spcPct val="150000"/>
+              </a:lnSpc>
+              <a:buNone/>
+            </a:pPr>
+            <a:r>
+              <a:rPr lang="en-US" altLang="en-US" sz="1300" b="1">
+                <a:latin typeface="Arial" panose="020B0604020202020204" pitchFamily="34" charset="0"/>
+              </a:rPr>
+              <a:t>$request-&gt;id </a:t>
+            </a:r>
+            <a:r>
+              <a:rPr lang="en-US" altLang="en-US" sz="1300">
+                <a:latin typeface="Arial" panose="020B0604020202020204" pitchFamily="34" charset="0"/>
+              </a:rPr>
+              <a:t>il</a:t>
+            </a:r>
+            <a:r>
+              <a:rPr lang="az-Latn-AZ" altLang="en-US" sz="1300">
+                <a:latin typeface="Arial" panose="020B0604020202020204" pitchFamily="34" charset="0"/>
+              </a:rPr>
+              <a:t>ə əldə etdiyimiz </a:t>
+            </a:r>
+            <a:r>
+              <a:rPr lang="az-Latn-AZ" altLang="en-US" sz="1300" b="1">
+                <a:latin typeface="Arial" panose="020B0604020202020204" pitchFamily="34" charset="0"/>
+              </a:rPr>
+              <a:t>identifikator</a:t>
+            </a:r>
+            <a:r>
+              <a:rPr lang="az-Latn-AZ" altLang="en-US" sz="1300">
+                <a:latin typeface="Arial" panose="020B0604020202020204" pitchFamily="34" charset="0"/>
+              </a:rPr>
+              <a:t>,</a:t>
+            </a:r>
+            <a:r>
+              <a:rPr lang="en-US" altLang="en-US" sz="1300">
+                <a:latin typeface="Arial" panose="020B0604020202020204" pitchFamily="34" charset="0"/>
+              </a:rPr>
+              <a:t> </a:t>
+            </a:r>
+            <a:r>
+              <a:rPr lang="en-US" altLang="en-US" sz="1300" b="1">
+                <a:latin typeface="Arial" panose="020B0604020202020204" pitchFamily="34" charset="0"/>
+              </a:rPr>
+              <a:t>Category</a:t>
+            </a:r>
+            <a:r>
+              <a:rPr lang="en-US" altLang="en-US" sz="1300">
+                <a:latin typeface="Arial" panose="020B0604020202020204" pitchFamily="34" charset="0"/>
+              </a:rPr>
+              <a:t> modelinin </a:t>
+            </a:r>
+            <a:r>
+              <a:rPr lang="en-US" altLang="en-US" sz="1300" b="1">
+                <a:latin typeface="Arial" panose="020B0604020202020204" pitchFamily="34" charset="0"/>
+              </a:rPr>
+              <a:t>identifikatorudur</a:t>
+            </a:r>
+            <a:r>
+              <a:rPr lang="en-US" altLang="en-US" sz="1300">
+                <a:latin typeface="Arial" panose="020B0604020202020204" pitchFamily="34" charset="0"/>
+              </a:rPr>
+              <a:t>. </a:t>
+            </a:r>
+            <a:r>
+              <a:rPr lang="az-Latn-AZ" altLang="en-US" sz="1300">
+                <a:latin typeface="Arial" panose="020B0604020202020204" pitchFamily="34" charset="0"/>
+              </a:rPr>
+              <a:t>Bizdə </a:t>
+            </a:r>
+            <a:r>
+              <a:rPr lang="en-US" altLang="en-US" sz="1300" b="1">
+                <a:latin typeface="Arial" panose="020B0604020202020204" pitchFamily="34" charset="0"/>
+              </a:rPr>
+              <a:t>where() </a:t>
+            </a:r>
+            <a:r>
+              <a:rPr lang="en-US" altLang="en-US" sz="1300">
+                <a:latin typeface="Arial" panose="020B0604020202020204" pitchFamily="34" charset="0"/>
+              </a:rPr>
+              <a:t>metodundan istifad</a:t>
+            </a:r>
+            <a:r>
+              <a:rPr lang="az-Latn-AZ" altLang="en-US" sz="1300">
+                <a:latin typeface="Arial" panose="020B0604020202020204" pitchFamily="34" charset="0"/>
+              </a:rPr>
+              <a:t>ə edərək deyirik ki, harada </a:t>
+            </a:r>
+            <a:r>
+              <a:rPr lang="az-Latn-AZ" altLang="en-US" sz="1300" b="1">
+                <a:latin typeface="Arial" panose="020B0604020202020204" pitchFamily="34" charset="0"/>
+              </a:rPr>
+              <a:t>SubCategory</a:t>
+            </a:r>
+            <a:r>
+              <a:rPr lang="az-Latn-AZ" altLang="en-US" sz="1300">
+                <a:latin typeface="Arial" panose="020B0604020202020204" pitchFamily="34" charset="0"/>
+              </a:rPr>
+              <a:t> modelinin </a:t>
+            </a:r>
+            <a:r>
+              <a:rPr lang="az-Latn-AZ" altLang="en-US" sz="1300" b="1">
+                <a:latin typeface="Arial" panose="020B0604020202020204" pitchFamily="34" charset="0"/>
+              </a:rPr>
+              <a:t>cateogry_id </a:t>
+            </a:r>
+            <a:r>
+              <a:rPr lang="az-Latn-AZ" altLang="en-US" sz="1300">
+                <a:latin typeface="Arial" panose="020B0604020202020204" pitchFamily="34" charset="0"/>
+              </a:rPr>
+              <a:t>sütununun dəyərləri ilə </a:t>
+            </a:r>
+            <a:r>
+              <a:rPr lang="en-US" altLang="en-US" sz="1300" b="1">
+                <a:latin typeface="Arial" panose="020B0604020202020204" pitchFamily="34" charset="0"/>
+              </a:rPr>
+              <a:t>Category</a:t>
+            </a:r>
+            <a:r>
+              <a:rPr lang="en-US" altLang="en-US" sz="1300">
+                <a:latin typeface="Arial" panose="020B0604020202020204" pitchFamily="34" charset="0"/>
+              </a:rPr>
+              <a:t> modelinin </a:t>
+            </a:r>
+            <a:r>
+              <a:rPr lang="az-Latn-AZ" altLang="en-US" sz="1300" b="1">
+                <a:latin typeface="Arial" panose="020B0604020202020204" pitchFamily="34" charset="0"/>
+              </a:rPr>
+              <a:t>identifikatoru</a:t>
+            </a:r>
+            <a:r>
+              <a:rPr lang="az-Latn-AZ" altLang="en-US" sz="1300">
+                <a:latin typeface="Arial" panose="020B0604020202020204" pitchFamily="34" charset="0"/>
+              </a:rPr>
+              <a:t> üst-üstə düşürsə, buna uyğun gələn adları </a:t>
+            </a:r>
+            <a:r>
+              <a:rPr lang="az-Latn-AZ" altLang="en-US" sz="1300" b="1">
+                <a:latin typeface="Arial" panose="020B0604020202020204" pitchFamily="34" charset="0"/>
+              </a:rPr>
+              <a:t>get() </a:t>
+            </a:r>
+            <a:r>
+              <a:rPr lang="az-Latn-AZ" altLang="en-US" sz="1300">
+                <a:latin typeface="Arial" panose="020B0604020202020204" pitchFamily="34" charset="0"/>
+              </a:rPr>
+              <a:t>meotdu ilə əldə et.</a:t>
+            </a:r>
+            <a:endParaRPr kumimoji="0" lang="en-US" altLang="en-US" sz="1300" b="0" i="0" u="none" strike="noStrike" cap="none" normalizeH="0" baseline="0">
+              <a:ln>
+                <a:noFill/>
+              </a:ln>
+              <a:solidFill>
+                <a:schemeClr val="tx1"/>
+              </a:solidFill>
+              <a:effectLst/>
+              <a:latin typeface="Arial" panose="020B0604020202020204" pitchFamily="34" charset="0"/>
+            </a:endParaRPr>
+          </a:p>
+        </p:txBody>
+      </p:sp>
+      <p:pic>
+        <p:nvPicPr>
+          <p:cNvPr id="4" name="Picture 3">
+            <a:extLst>
+              <a:ext uri="{FF2B5EF4-FFF2-40B4-BE49-F238E27FC236}">
+                <a16:creationId xmlns:a16="http://schemas.microsoft.com/office/drawing/2014/main" id="{3B049F2F-67DD-E804-3EDC-5F50D987BCBB}"/>
+              </a:ext>
+            </a:extLst>
+          </p:cNvPr>
+          <p:cNvPicPr>
+            <a:picLocks noChangeAspect="1"/>
+          </p:cNvPicPr>
+          <p:nvPr/>
+        </p:nvPicPr>
+        <p:blipFill>
+          <a:blip r:embed="rId2"/>
+          <a:stretch>
+            <a:fillRect/>
+          </a:stretch>
+        </p:blipFill>
+        <p:spPr>
+          <a:xfrm>
+            <a:off x="7213600" y="1159346"/>
+            <a:ext cx="4978400" cy="5698654"/>
+          </a:xfrm>
+          <a:prstGeom prst="rect">
+            <a:avLst/>
+          </a:prstGeom>
+        </p:spPr>
+      </p:pic>
+      <p:pic>
+        <p:nvPicPr>
+          <p:cNvPr id="6" name="Picture 5">
+            <a:extLst>
+              <a:ext uri="{FF2B5EF4-FFF2-40B4-BE49-F238E27FC236}">
+                <a16:creationId xmlns:a16="http://schemas.microsoft.com/office/drawing/2014/main" id="{8A3D5A38-2F17-15D4-A935-89DA3F0A163F}"/>
+              </a:ext>
+            </a:extLst>
+          </p:cNvPr>
+          <p:cNvPicPr>
+            <a:picLocks noChangeAspect="1"/>
+          </p:cNvPicPr>
+          <p:nvPr/>
+        </p:nvPicPr>
+        <p:blipFill>
+          <a:blip r:embed="rId3"/>
+          <a:stretch>
+            <a:fillRect/>
+          </a:stretch>
+        </p:blipFill>
+        <p:spPr>
+          <a:xfrm>
+            <a:off x="0" y="2604654"/>
+            <a:ext cx="5972691" cy="4253345"/>
+          </a:xfrm>
+          <a:prstGeom prst="rect">
+            <a:avLst/>
+          </a:prstGeom>
+        </p:spPr>
+      </p:pic>
+    </p:spTree>
+    <p:extLst>
+      <p:ext uri="{BB962C8B-B14F-4D97-AF65-F5344CB8AC3E}">
+        <p14:creationId xmlns:p14="http://schemas.microsoft.com/office/powerpoint/2010/main" val="777505261"/>
+      </p:ext>
+    </p:extLst>
+  </p:cSld>
+  <p:clrMapOvr>
+    <a:masterClrMapping/>
+  </p:clrMapOvr>
+</p:sld>
+</file>
+
+<file path=ppt/slides/slide14.xml><?xml version="1.0" encoding="utf-8"?>
+<p:sld xmlns:a="http://schemas.openxmlformats.org/drawingml/2006/main" xmlns:r="http://schemas.openxmlformats.org/officeDocument/2006/relationships" xmlns:p="http://schemas.openxmlformats.org/presentationml/2006/main">
+  <p:cSld>
+    <p:spTree>
+      <p:nvGrpSpPr>
+        <p:cNvPr id="1" name="">
+          <a:extLst>
+            <a:ext uri="{FF2B5EF4-FFF2-40B4-BE49-F238E27FC236}">
+              <a16:creationId xmlns:a16="http://schemas.microsoft.com/office/drawing/2014/main" id="{DAAA793B-6D72-6204-48CD-81151F98F199}"/>
+            </a:ext>
+          </a:extLst>
+        </p:cNvPr>
+        <p:cNvGrpSpPr/>
+        <p:nvPr/>
+      </p:nvGrpSpPr>
+      <p:grpSpPr>
+        <a:xfrm>
+          <a:off x="0" y="0"/>
+          <a:ext cx="0" cy="0"/>
+          <a:chOff x="0" y="0"/>
+          <a:chExt cx="0" cy="0"/>
+        </a:xfrm>
+      </p:grpSpPr>
+      <p:sp>
+        <p:nvSpPr>
+          <p:cNvPr id="3" name="TextBox 2">
+            <a:extLst>
+              <a:ext uri="{FF2B5EF4-FFF2-40B4-BE49-F238E27FC236}">
+                <a16:creationId xmlns:a16="http://schemas.microsoft.com/office/drawing/2014/main" id="{1E9E280F-5D64-C3AA-FFCE-4C21B5EE047D}"/>
+              </a:ext>
+            </a:extLst>
+          </p:cNvPr>
+          <p:cNvSpPr txBox="1"/>
+          <p:nvPr/>
+        </p:nvSpPr>
+        <p:spPr>
+          <a:xfrm>
+            <a:off x="88405" y="208862"/>
+            <a:ext cx="3015013" cy="955518"/>
+          </a:xfrm>
+          <a:prstGeom prst="rect">
+            <a:avLst/>
+          </a:prstGeom>
+          <a:noFill/>
+        </p:spPr>
+        <p:txBody>
+          <a:bodyPr wrap="square">
+            <a:spAutoFit/>
+          </a:bodyPr>
+          <a:lstStyle/>
+          <a:p>
+            <a:pPr algn="just">
+              <a:lnSpc>
+                <a:spcPct val="150000"/>
+              </a:lnSpc>
+              <a:buNone/>
+            </a:pPr>
+            <a:r>
+              <a:rPr lang="az-Latn-AZ" altLang="en-US" sz="1300">
+                <a:latin typeface="Arial" panose="020B0604020202020204" pitchFamily="34" charset="0"/>
+              </a:rPr>
+              <a:t>Məsələn, Geyim </a:t>
+            </a:r>
+            <a:r>
+              <a:rPr lang="az-Latn-AZ" altLang="en-US" sz="1300" b="1">
+                <a:latin typeface="Arial" panose="020B0604020202020204" pitchFamily="34" charset="0"/>
+              </a:rPr>
+              <a:t>Category</a:t>
+            </a:r>
+            <a:r>
+              <a:rPr lang="az-Latn-AZ" altLang="en-US" sz="1300">
+                <a:latin typeface="Arial" panose="020B0604020202020204" pitchFamily="34" charset="0"/>
+              </a:rPr>
+              <a:t> üçün</a:t>
+            </a:r>
+          </a:p>
+          <a:p>
+            <a:pPr algn="just">
+              <a:lnSpc>
+                <a:spcPct val="150000"/>
+              </a:lnSpc>
+              <a:buNone/>
+            </a:pPr>
+            <a:r>
+              <a:rPr kumimoji="0" lang="az-Latn-AZ" altLang="en-US" sz="1300" b="1" i="0" u="none" strike="noStrike" cap="none" normalizeH="0" baseline="0">
+                <a:ln>
+                  <a:noFill/>
+                </a:ln>
+                <a:solidFill>
+                  <a:schemeClr val="tx1"/>
+                </a:solidFill>
+                <a:effectLst/>
+                <a:latin typeface="Arial" panose="020B0604020202020204" pitchFamily="34" charset="0"/>
+              </a:rPr>
+              <a:t>subCategory</a:t>
+            </a:r>
+            <a:r>
+              <a:rPr kumimoji="0" lang="az-Latn-AZ" altLang="en-US" sz="1300" b="0" i="0" u="none" strike="noStrike" cap="none" normalizeH="0" baseline="0">
+                <a:ln>
+                  <a:noFill/>
+                </a:ln>
+                <a:solidFill>
+                  <a:schemeClr val="tx1"/>
+                </a:solidFill>
+                <a:effectLst/>
+                <a:latin typeface="Arial" panose="020B0604020202020204" pitchFamily="34" charset="0"/>
+              </a:rPr>
+              <a:t> </a:t>
+            </a:r>
+            <a:r>
+              <a:rPr lang="az-Latn-AZ" altLang="en-US" sz="1300">
+                <a:latin typeface="Arial" panose="020B0604020202020204" pitchFamily="34" charset="0"/>
+              </a:rPr>
+              <a:t>əlavə edilmədiyi üçün</a:t>
+            </a:r>
+          </a:p>
+          <a:p>
+            <a:pPr algn="just">
+              <a:lnSpc>
+                <a:spcPct val="150000"/>
+              </a:lnSpc>
+              <a:buNone/>
+            </a:pPr>
+            <a:r>
+              <a:rPr kumimoji="0" lang="az-Latn-AZ" altLang="en-US" sz="1300" b="0" i="0" u="none" strike="noStrike" cap="none" normalizeH="0" baseline="0">
+                <a:ln>
+                  <a:noFill/>
+                </a:ln>
+                <a:solidFill>
+                  <a:schemeClr val="tx1"/>
+                </a:solidFill>
+                <a:effectLst/>
+                <a:latin typeface="Arial" panose="020B0604020202020204" pitchFamily="34" charset="0"/>
+              </a:rPr>
+              <a:t>boş </a:t>
+            </a:r>
+            <a:r>
+              <a:rPr kumimoji="0" lang="az-Latn-AZ" altLang="en-US" sz="1300" b="1" i="0" u="none" strike="noStrike" cap="none" normalizeH="0" baseline="0">
+                <a:ln>
+                  <a:noFill/>
+                </a:ln>
+                <a:solidFill>
+                  <a:schemeClr val="tx1"/>
+                </a:solidFill>
+                <a:effectLst/>
+                <a:latin typeface="Arial" panose="020B0604020202020204" pitchFamily="34" charset="0"/>
+              </a:rPr>
+              <a:t>array</a:t>
+            </a:r>
+            <a:r>
+              <a:rPr kumimoji="0" lang="az-Latn-AZ" altLang="en-US" sz="1300" b="0" i="0" u="none" strike="noStrike" cap="none" normalizeH="0" baseline="0">
+                <a:ln>
+                  <a:noFill/>
+                </a:ln>
+                <a:solidFill>
+                  <a:schemeClr val="tx1"/>
+                </a:solidFill>
+                <a:effectLst/>
+                <a:latin typeface="Arial" panose="020B0604020202020204" pitchFamily="34" charset="0"/>
+              </a:rPr>
+              <a:t> qayıdır.</a:t>
+            </a:r>
+            <a:endParaRPr kumimoji="0" lang="en-US" altLang="en-US" sz="1300" b="0" i="0" u="none" strike="noStrike" cap="none" normalizeH="0" baseline="0">
+              <a:ln>
+                <a:noFill/>
+              </a:ln>
+              <a:solidFill>
+                <a:schemeClr val="tx1"/>
+              </a:solidFill>
+              <a:effectLst/>
+              <a:latin typeface="Arial" panose="020B0604020202020204" pitchFamily="34" charset="0"/>
+            </a:endParaRPr>
+          </a:p>
+        </p:txBody>
+      </p:sp>
+      <p:pic>
+        <p:nvPicPr>
+          <p:cNvPr id="4" name="Picture 3">
+            <a:extLst>
+              <a:ext uri="{FF2B5EF4-FFF2-40B4-BE49-F238E27FC236}">
+                <a16:creationId xmlns:a16="http://schemas.microsoft.com/office/drawing/2014/main" id="{888CD381-09C1-4001-E328-08C260399A88}"/>
+              </a:ext>
+            </a:extLst>
+          </p:cNvPr>
+          <p:cNvPicPr>
+            <a:picLocks noChangeAspect="1"/>
+          </p:cNvPicPr>
+          <p:nvPr/>
+        </p:nvPicPr>
+        <p:blipFill>
+          <a:blip r:embed="rId2"/>
+          <a:stretch>
+            <a:fillRect/>
+          </a:stretch>
+        </p:blipFill>
+        <p:spPr>
+          <a:xfrm>
+            <a:off x="3182471" y="0"/>
+            <a:ext cx="9009529" cy="6858000"/>
+          </a:xfrm>
+          <a:prstGeom prst="rect">
+            <a:avLst/>
+          </a:prstGeom>
+          <a:ln w="38100" cap="sq">
+            <a:solidFill>
+              <a:srgbClr val="000000"/>
+            </a:solidFill>
+            <a:prstDash val="solid"/>
+            <a:miter lim="800000"/>
+          </a:ln>
+          <a:effectLst>
+            <a:outerShdw blurRad="50800" dist="38100" dir="2700000" algn="tl" rotWithShape="0">
+              <a:srgbClr val="000000">
+                <a:alpha val="43000"/>
+              </a:srgbClr>
+            </a:outerShdw>
+          </a:effectLst>
+        </p:spPr>
+      </p:pic>
+    </p:spTree>
+    <p:extLst>
+      <p:ext uri="{BB962C8B-B14F-4D97-AF65-F5344CB8AC3E}">
+        <p14:creationId xmlns:p14="http://schemas.microsoft.com/office/powerpoint/2010/main" val="1112185219"/>
+      </p:ext>
+    </p:extLst>
+  </p:cSld>
+  <p:clrMapOvr>
+    <a:masterClrMapping/>
+  </p:clrMapOvr>
+</p:sld>
+</file>
+
+<file path=ppt/slides/slide15.xml><?xml version="1.0" encoding="utf-8"?>
+<p:sld xmlns:a="http://schemas.openxmlformats.org/drawingml/2006/main" xmlns:r="http://schemas.openxmlformats.org/officeDocument/2006/relationships" xmlns:p="http://schemas.openxmlformats.org/presentationml/2006/main">
+  <p:cSld>
+    <p:spTree>
+      <p:nvGrpSpPr>
+        <p:cNvPr id="1" name="">
+          <a:extLst>
+            <a:ext uri="{FF2B5EF4-FFF2-40B4-BE49-F238E27FC236}">
+              <a16:creationId xmlns:a16="http://schemas.microsoft.com/office/drawing/2014/main" id="{3B7342AD-5CB6-5DA8-024C-1951A6DB3194}"/>
+            </a:ext>
+          </a:extLst>
+        </p:cNvPr>
+        <p:cNvGrpSpPr/>
+        <p:nvPr/>
+      </p:nvGrpSpPr>
+      <p:grpSpPr>
+        <a:xfrm>
+          <a:off x="0" y="0"/>
+          <a:ext cx="0" cy="0"/>
+          <a:chOff x="0" y="0"/>
+          <a:chExt cx="0" cy="0"/>
+        </a:xfrm>
+      </p:grpSpPr>
+      <p:sp>
+        <p:nvSpPr>
+          <p:cNvPr id="3" name="TextBox 2">
+            <a:extLst>
+              <a:ext uri="{FF2B5EF4-FFF2-40B4-BE49-F238E27FC236}">
+                <a16:creationId xmlns:a16="http://schemas.microsoft.com/office/drawing/2014/main" id="{47985BFC-38F4-3610-2A69-A1A287DD1914}"/>
+              </a:ext>
+            </a:extLst>
+          </p:cNvPr>
+          <p:cNvSpPr txBox="1"/>
+          <p:nvPr/>
+        </p:nvSpPr>
+        <p:spPr>
+          <a:xfrm>
+            <a:off x="217714" y="255046"/>
+            <a:ext cx="11756571" cy="1255600"/>
+          </a:xfrm>
+          <a:prstGeom prst="rect">
+            <a:avLst/>
+          </a:prstGeom>
+          <a:noFill/>
+        </p:spPr>
+        <p:txBody>
+          <a:bodyPr wrap="square">
+            <a:spAutoFit/>
+          </a:bodyPr>
+          <a:lstStyle/>
+          <a:p>
+            <a:pPr>
+              <a:lnSpc>
+                <a:spcPct val="150000"/>
+              </a:lnSpc>
+              <a:buNone/>
+            </a:pPr>
+            <a:r>
+              <a:rPr lang="en-US" altLang="en-US" sz="1300">
+                <a:latin typeface="Arial" panose="020B0604020202020204" pitchFamily="34" charset="0"/>
+              </a:rPr>
+              <a:t>resources\views\admin\child-category\create.blade.php</a:t>
+            </a:r>
+          </a:p>
+          <a:p>
+            <a:pPr>
+              <a:lnSpc>
+                <a:spcPct val="150000"/>
+              </a:lnSpc>
+              <a:buNone/>
+            </a:pPr>
+            <a:endParaRPr kumimoji="0" lang="en-US" altLang="en-US" sz="1300" b="0" i="0" u="none" strike="noStrike" cap="none" normalizeH="0" baseline="0">
+              <a:ln>
+                <a:noFill/>
+              </a:ln>
+              <a:solidFill>
+                <a:schemeClr val="tx1"/>
+              </a:solidFill>
+              <a:effectLst/>
+              <a:latin typeface="Arial" panose="020B0604020202020204" pitchFamily="34" charset="0"/>
+            </a:endParaRPr>
+          </a:p>
+          <a:p>
+            <a:pPr>
+              <a:lnSpc>
+                <a:spcPct val="150000"/>
+              </a:lnSpc>
+              <a:buNone/>
+            </a:pPr>
+            <a:r>
+              <a:rPr lang="en-US" altLang="en-US" sz="1300" b="1">
+                <a:latin typeface="Arial" panose="020B0604020202020204" pitchFamily="34" charset="0"/>
+              </a:rPr>
+              <a:t>Category</a:t>
+            </a:r>
+            <a:r>
+              <a:rPr lang="en-US" altLang="en-US" sz="1300">
+                <a:latin typeface="Arial" panose="020B0604020202020204" pitchFamily="34" charset="0"/>
+              </a:rPr>
+              <a:t> </a:t>
+            </a:r>
+            <a:r>
+              <a:rPr lang="az-Latn-AZ" altLang="en-US" sz="1300">
+                <a:latin typeface="Arial" panose="020B0604020202020204" pitchFamily="34" charset="0"/>
+              </a:rPr>
+              <a:t>seçdikdə, geriyə bizə </a:t>
+            </a:r>
+            <a:r>
+              <a:rPr lang="az-Latn-AZ" altLang="en-US" sz="1300" b="1">
+                <a:latin typeface="Arial" panose="020B0604020202020204" pitchFamily="34" charset="0"/>
+              </a:rPr>
+              <a:t>data</a:t>
+            </a:r>
+            <a:r>
+              <a:rPr lang="az-Latn-AZ" altLang="en-US" sz="1300">
+                <a:latin typeface="Arial" panose="020B0604020202020204" pitchFamily="34" charset="0"/>
+              </a:rPr>
+              <a:t> return olur. Bu datanı </a:t>
+            </a:r>
+            <a:r>
+              <a:rPr lang="az-Latn-AZ" altLang="en-US" sz="1300" b="1">
+                <a:latin typeface="Arial" panose="020B0604020202020204" pitchFamily="34" charset="0"/>
+              </a:rPr>
+              <a:t>console</a:t>
+            </a:r>
+            <a:r>
+              <a:rPr lang="az-Latn-AZ" altLang="en-US" sz="1300">
+                <a:latin typeface="Arial" panose="020B0604020202020204" pitchFamily="34" charset="0"/>
+              </a:rPr>
+              <a:t> pəncərəsində</a:t>
+            </a:r>
+          </a:p>
+          <a:p>
+            <a:pPr>
+              <a:lnSpc>
+                <a:spcPct val="150000"/>
+              </a:lnSpc>
+              <a:buNone/>
+            </a:pPr>
+            <a:r>
+              <a:rPr kumimoji="0" lang="az-Latn-AZ" altLang="en-US" sz="1300" b="0" i="0" u="none" strike="noStrike" cap="none" normalizeH="0" baseline="0">
+                <a:ln>
+                  <a:noFill/>
+                </a:ln>
+                <a:solidFill>
+                  <a:schemeClr val="tx1"/>
+                </a:solidFill>
+                <a:effectLst/>
+                <a:latin typeface="Arial" panose="020B0604020202020204" pitchFamily="34" charset="0"/>
+              </a:rPr>
+              <a:t>görə bilərik.</a:t>
+            </a:r>
+            <a:endParaRPr kumimoji="0" lang="en-US" altLang="en-US" sz="1300" b="0" i="0" u="none" strike="noStrike" cap="none" normalizeH="0" baseline="0">
+              <a:ln>
+                <a:noFill/>
+              </a:ln>
+              <a:solidFill>
+                <a:schemeClr val="tx1"/>
+              </a:solidFill>
+              <a:effectLst/>
+              <a:latin typeface="Arial" panose="020B0604020202020204" pitchFamily="34" charset="0"/>
+            </a:endParaRPr>
+          </a:p>
+        </p:txBody>
+      </p:sp>
+      <p:pic>
+        <p:nvPicPr>
+          <p:cNvPr id="4" name="Picture 3">
+            <a:extLst>
+              <a:ext uri="{FF2B5EF4-FFF2-40B4-BE49-F238E27FC236}">
+                <a16:creationId xmlns:a16="http://schemas.microsoft.com/office/drawing/2014/main" id="{EC3F95FC-17A3-83BD-9F24-8C81550C0C70}"/>
+              </a:ext>
+            </a:extLst>
+          </p:cNvPr>
+          <p:cNvPicPr>
+            <a:picLocks noChangeAspect="1"/>
+          </p:cNvPicPr>
+          <p:nvPr/>
+        </p:nvPicPr>
+        <p:blipFill>
+          <a:blip r:embed="rId2"/>
+          <a:stretch>
+            <a:fillRect/>
+          </a:stretch>
+        </p:blipFill>
+        <p:spPr>
+          <a:xfrm>
+            <a:off x="7184180" y="0"/>
+            <a:ext cx="5007820" cy="6858000"/>
+          </a:xfrm>
+          <a:prstGeom prst="rect">
+            <a:avLst/>
+          </a:prstGeom>
+        </p:spPr>
+      </p:pic>
+      <p:pic>
+        <p:nvPicPr>
+          <p:cNvPr id="6" name="Picture 5">
+            <a:extLst>
+              <a:ext uri="{FF2B5EF4-FFF2-40B4-BE49-F238E27FC236}">
+                <a16:creationId xmlns:a16="http://schemas.microsoft.com/office/drawing/2014/main" id="{B788B19E-0CD2-4CD7-F5B8-D209D058A08A}"/>
+              </a:ext>
+            </a:extLst>
+          </p:cNvPr>
+          <p:cNvPicPr>
+            <a:picLocks noChangeAspect="1"/>
+          </p:cNvPicPr>
+          <p:nvPr/>
+        </p:nvPicPr>
+        <p:blipFill>
+          <a:blip r:embed="rId3"/>
+          <a:stretch>
+            <a:fillRect/>
+          </a:stretch>
+        </p:blipFill>
+        <p:spPr>
+          <a:xfrm>
+            <a:off x="0" y="2133600"/>
+            <a:ext cx="5383293" cy="4724400"/>
+          </a:xfrm>
+          <a:prstGeom prst="rect">
+            <a:avLst/>
+          </a:prstGeom>
+        </p:spPr>
+      </p:pic>
+    </p:spTree>
+    <p:extLst>
+      <p:ext uri="{BB962C8B-B14F-4D97-AF65-F5344CB8AC3E}">
+        <p14:creationId xmlns:p14="http://schemas.microsoft.com/office/powerpoint/2010/main" val="1879657841"/>
+      </p:ext>
+    </p:extLst>
+  </p:cSld>
+  <p:clrMapOvr>
+    <a:masterClrMapping/>
+  </p:clrMapOvr>
+</p:sld>
+</file>
+
+<file path=ppt/slides/slide16.xml><?xml version="1.0" encoding="utf-8"?>
+<p:sld xmlns:a="http://schemas.openxmlformats.org/drawingml/2006/main" xmlns:r="http://schemas.openxmlformats.org/officeDocument/2006/relationships" xmlns:p="http://schemas.openxmlformats.org/presentationml/2006/main">
+  <p:cSld>
+    <p:spTree>
+      <p:nvGrpSpPr>
+        <p:cNvPr id="1" name="">
+          <a:extLst>
+            <a:ext uri="{FF2B5EF4-FFF2-40B4-BE49-F238E27FC236}">
+              <a16:creationId xmlns:a16="http://schemas.microsoft.com/office/drawing/2014/main" id="{710C4B62-CB55-6636-A58C-62EF8F43A5DE}"/>
+            </a:ext>
+          </a:extLst>
+        </p:cNvPr>
+        <p:cNvGrpSpPr/>
+        <p:nvPr/>
+      </p:nvGrpSpPr>
+      <p:grpSpPr>
+        <a:xfrm>
+          <a:off x="0" y="0"/>
+          <a:ext cx="0" cy="0"/>
+          <a:chOff x="0" y="0"/>
+          <a:chExt cx="0" cy="0"/>
+        </a:xfrm>
+      </p:grpSpPr>
+      <p:sp>
+        <p:nvSpPr>
+          <p:cNvPr id="3" name="TextBox 2">
+            <a:extLst>
+              <a:ext uri="{FF2B5EF4-FFF2-40B4-BE49-F238E27FC236}">
+                <a16:creationId xmlns:a16="http://schemas.microsoft.com/office/drawing/2014/main" id="{14B10755-8E12-2279-FAA2-9E098124690D}"/>
+              </a:ext>
+            </a:extLst>
+          </p:cNvPr>
+          <p:cNvSpPr txBox="1"/>
+          <p:nvPr/>
+        </p:nvSpPr>
+        <p:spPr>
+          <a:xfrm>
+            <a:off x="217714" y="255046"/>
+            <a:ext cx="11756571" cy="955518"/>
+          </a:xfrm>
+          <a:prstGeom prst="rect">
+            <a:avLst/>
+          </a:prstGeom>
+          <a:noFill/>
+        </p:spPr>
+        <p:txBody>
+          <a:bodyPr wrap="square">
+            <a:spAutoFit/>
+          </a:bodyPr>
+          <a:lstStyle/>
+          <a:p>
+            <a:pPr>
+              <a:lnSpc>
+                <a:spcPct val="150000"/>
+              </a:lnSpc>
+              <a:buNone/>
+            </a:pPr>
+            <a:r>
+              <a:rPr lang="en-US" altLang="en-US" sz="1300" b="1">
+                <a:latin typeface="Arial" panose="020B0604020202020204" pitchFamily="34" charset="0"/>
+              </a:rPr>
+              <a:t>resources\views\admin\child-category\create.blade.php</a:t>
+            </a:r>
+          </a:p>
+          <a:p>
+            <a:pPr>
+              <a:lnSpc>
+                <a:spcPct val="150000"/>
+              </a:lnSpc>
+              <a:buNone/>
+            </a:pPr>
+            <a:endParaRPr lang="en-US" altLang="en-US" sz="1300" b="1">
+              <a:latin typeface="Arial" panose="020B0604020202020204" pitchFamily="34" charset="0"/>
+            </a:endParaRPr>
+          </a:p>
+          <a:p>
+            <a:pPr>
+              <a:lnSpc>
+                <a:spcPct val="150000"/>
+              </a:lnSpc>
+              <a:buNone/>
+            </a:pPr>
+            <a:r>
+              <a:rPr lang="az-Latn-AZ" altLang="en-US" sz="1300" b="1">
+                <a:latin typeface="Arial" panose="020B0604020202020204" pitchFamily="34" charset="0"/>
+              </a:rPr>
+              <a:t>sub-category</a:t>
+            </a:r>
+            <a:r>
+              <a:rPr lang="az-Latn-AZ" altLang="en-US" sz="1300">
+                <a:latin typeface="Arial" panose="020B0604020202020204" pitchFamily="34" charset="0"/>
+              </a:rPr>
+              <a:t> klas adı əlavə edirik.</a:t>
+            </a:r>
+            <a:endParaRPr kumimoji="0" lang="en-US" altLang="en-US" sz="1300" b="0" i="0" u="none" strike="noStrike" cap="none" normalizeH="0" baseline="0">
+              <a:ln>
+                <a:noFill/>
+              </a:ln>
+              <a:solidFill>
+                <a:schemeClr val="tx1"/>
+              </a:solidFill>
+              <a:effectLst/>
+              <a:latin typeface="Arial" panose="020B0604020202020204" pitchFamily="34" charset="0"/>
+            </a:endParaRPr>
+          </a:p>
+        </p:txBody>
+      </p:sp>
+      <p:pic>
+        <p:nvPicPr>
+          <p:cNvPr id="4" name="Picture 3">
+            <a:extLst>
+              <a:ext uri="{FF2B5EF4-FFF2-40B4-BE49-F238E27FC236}">
+                <a16:creationId xmlns:a16="http://schemas.microsoft.com/office/drawing/2014/main" id="{FBE9FBA3-0A12-7827-ECB1-95576DDA3171}"/>
+              </a:ext>
+            </a:extLst>
+          </p:cNvPr>
+          <p:cNvPicPr>
+            <a:picLocks noChangeAspect="1"/>
+          </p:cNvPicPr>
+          <p:nvPr/>
+        </p:nvPicPr>
+        <p:blipFill>
+          <a:blip r:embed="rId2"/>
+          <a:stretch>
+            <a:fillRect/>
+          </a:stretch>
+        </p:blipFill>
+        <p:spPr>
+          <a:xfrm>
+            <a:off x="5195233" y="0"/>
+            <a:ext cx="6996767" cy="6858000"/>
+          </a:xfrm>
+          <a:prstGeom prst="rect">
+            <a:avLst/>
+          </a:prstGeom>
+        </p:spPr>
+      </p:pic>
+    </p:spTree>
+    <p:extLst>
+      <p:ext uri="{BB962C8B-B14F-4D97-AF65-F5344CB8AC3E}">
+        <p14:creationId xmlns:p14="http://schemas.microsoft.com/office/powerpoint/2010/main" val="2730333040"/>
+      </p:ext>
+    </p:extLst>
+  </p:cSld>
+  <p:clrMapOvr>
+    <a:masterClrMapping/>
+  </p:clrMapOvr>
+</p:sld>
+</file>
+
+<file path=ppt/slides/slide17.xml><?xml version="1.0" encoding="utf-8"?>
+<p:sld xmlns:a="http://schemas.openxmlformats.org/drawingml/2006/main" xmlns:r="http://schemas.openxmlformats.org/officeDocument/2006/relationships" xmlns:p="http://schemas.openxmlformats.org/presentationml/2006/main">
+  <p:cSld>
+    <p:spTree>
+      <p:nvGrpSpPr>
+        <p:cNvPr id="1" name="">
+          <a:extLst>
+            <a:ext uri="{FF2B5EF4-FFF2-40B4-BE49-F238E27FC236}">
+              <a16:creationId xmlns:a16="http://schemas.microsoft.com/office/drawing/2014/main" id="{2A3978D4-6BD9-5DE8-A946-5EB47A21BCFF}"/>
+            </a:ext>
+          </a:extLst>
+        </p:cNvPr>
+        <p:cNvGrpSpPr/>
+        <p:nvPr/>
+      </p:nvGrpSpPr>
+      <p:grpSpPr>
+        <a:xfrm>
+          <a:off x="0" y="0"/>
+          <a:ext cx="0" cy="0"/>
+          <a:chOff x="0" y="0"/>
+          <a:chExt cx="0" cy="0"/>
+        </a:xfrm>
+      </p:grpSpPr>
+      <p:sp>
+        <p:nvSpPr>
+          <p:cNvPr id="3" name="TextBox 2">
+            <a:extLst>
+              <a:ext uri="{FF2B5EF4-FFF2-40B4-BE49-F238E27FC236}">
+                <a16:creationId xmlns:a16="http://schemas.microsoft.com/office/drawing/2014/main" id="{480DBF21-98C4-D039-811B-1D4CFCA3E417}"/>
+              </a:ext>
+            </a:extLst>
+          </p:cNvPr>
+          <p:cNvSpPr txBox="1"/>
+          <p:nvPr/>
+        </p:nvSpPr>
+        <p:spPr>
+          <a:xfrm>
+            <a:off x="217714" y="255046"/>
+            <a:ext cx="11756571" cy="1255600"/>
+          </a:xfrm>
+          <a:prstGeom prst="rect">
+            <a:avLst/>
+          </a:prstGeom>
+          <a:noFill/>
+        </p:spPr>
+        <p:txBody>
+          <a:bodyPr wrap="square">
+            <a:spAutoFit/>
+          </a:bodyPr>
+          <a:lstStyle/>
+          <a:p>
+            <a:pPr>
+              <a:lnSpc>
+                <a:spcPct val="150000"/>
+              </a:lnSpc>
+              <a:buNone/>
+            </a:pPr>
+            <a:r>
+              <a:rPr lang="en-US" altLang="en-US" sz="1300">
+                <a:latin typeface="Arial" panose="020B0604020202020204" pitchFamily="34" charset="0"/>
+              </a:rPr>
+              <a:t>resources\views\admin\child-category\create.blade.php</a:t>
+            </a:r>
+          </a:p>
+          <a:p>
+            <a:pPr>
+              <a:lnSpc>
+                <a:spcPct val="150000"/>
+              </a:lnSpc>
+              <a:buNone/>
+            </a:pPr>
+            <a:endParaRPr kumimoji="0" lang="en-US" altLang="en-US" sz="1300" b="0" i="0" u="none" strike="noStrike" cap="none" normalizeH="0" baseline="0">
+              <a:ln>
+                <a:noFill/>
+              </a:ln>
+              <a:solidFill>
+                <a:schemeClr val="tx1"/>
+              </a:solidFill>
+              <a:effectLst/>
+              <a:latin typeface="Arial" panose="020B0604020202020204" pitchFamily="34" charset="0"/>
+            </a:endParaRPr>
+          </a:p>
+          <a:p>
+            <a:pPr>
+              <a:lnSpc>
+                <a:spcPct val="150000"/>
+              </a:lnSpc>
+              <a:buNone/>
+            </a:pPr>
+            <a:endParaRPr lang="en-US" altLang="en-US" sz="1300">
+              <a:latin typeface="Arial" panose="020B0604020202020204" pitchFamily="34" charset="0"/>
+            </a:endParaRPr>
+          </a:p>
+          <a:p>
+            <a:pPr>
+              <a:lnSpc>
+                <a:spcPct val="150000"/>
+              </a:lnSpc>
+              <a:buNone/>
+            </a:pPr>
+            <a:endParaRPr kumimoji="0" lang="en-US" altLang="en-US" sz="1300" b="0" i="0" u="none" strike="noStrike" cap="none" normalizeH="0" baseline="0">
+              <a:ln>
+                <a:noFill/>
+              </a:ln>
+              <a:solidFill>
+                <a:schemeClr val="tx1"/>
+              </a:solidFill>
+              <a:effectLst/>
+              <a:latin typeface="Arial" panose="020B0604020202020204" pitchFamily="34" charset="0"/>
+            </a:endParaRPr>
+          </a:p>
+        </p:txBody>
+      </p:sp>
+      <p:pic>
+        <p:nvPicPr>
+          <p:cNvPr id="4" name="Picture 3">
+            <a:extLst>
+              <a:ext uri="{FF2B5EF4-FFF2-40B4-BE49-F238E27FC236}">
+                <a16:creationId xmlns:a16="http://schemas.microsoft.com/office/drawing/2014/main" id="{6B1A4F76-6B76-6EEE-7150-F83F10A100E7}"/>
+              </a:ext>
+            </a:extLst>
+          </p:cNvPr>
+          <p:cNvPicPr>
+            <a:picLocks noChangeAspect="1"/>
+          </p:cNvPicPr>
+          <p:nvPr/>
+        </p:nvPicPr>
+        <p:blipFill>
+          <a:blip r:embed="rId2"/>
+          <a:stretch>
+            <a:fillRect/>
+          </a:stretch>
+        </p:blipFill>
+        <p:spPr>
+          <a:xfrm>
+            <a:off x="5004063" y="0"/>
+            <a:ext cx="7187937" cy="6858000"/>
+          </a:xfrm>
+          <a:prstGeom prst="rect">
+            <a:avLst/>
+          </a:prstGeom>
+        </p:spPr>
+      </p:pic>
+    </p:spTree>
+    <p:extLst>
+      <p:ext uri="{BB962C8B-B14F-4D97-AF65-F5344CB8AC3E}">
+        <p14:creationId xmlns:p14="http://schemas.microsoft.com/office/powerpoint/2010/main" val="1238744895"/>
+      </p:ext>
+    </p:extLst>
+  </p:cSld>
+  <p:clrMapOvr>
+    <a:masterClrMapping/>
+  </p:clrMapOvr>
+</p:sld>
+</file>
+
+<file path=ppt/slides/slide18.xml><?xml version="1.0" encoding="utf-8"?>
+<p:sld xmlns:a="http://schemas.openxmlformats.org/drawingml/2006/main" xmlns:r="http://schemas.openxmlformats.org/officeDocument/2006/relationships" xmlns:p="http://schemas.openxmlformats.org/presentationml/2006/main">
+  <p:cSld>
+    <p:spTree>
+      <p:nvGrpSpPr>
+        <p:cNvPr id="1" name="">
+          <a:extLst>
+            <a:ext uri="{FF2B5EF4-FFF2-40B4-BE49-F238E27FC236}">
+              <a16:creationId xmlns:a16="http://schemas.microsoft.com/office/drawing/2014/main" id="{93F56B21-8167-FB13-5DD3-BFF429BF27EA}"/>
+            </a:ext>
+          </a:extLst>
+        </p:cNvPr>
+        <p:cNvGrpSpPr/>
+        <p:nvPr/>
+      </p:nvGrpSpPr>
+      <p:grpSpPr>
+        <a:xfrm>
+          <a:off x="0" y="0"/>
+          <a:ext cx="0" cy="0"/>
+          <a:chOff x="0" y="0"/>
+          <a:chExt cx="0" cy="0"/>
+        </a:xfrm>
+      </p:grpSpPr>
+      <p:sp>
+        <p:nvSpPr>
+          <p:cNvPr id="3" name="TextBox 2">
+            <a:extLst>
+              <a:ext uri="{FF2B5EF4-FFF2-40B4-BE49-F238E27FC236}">
+                <a16:creationId xmlns:a16="http://schemas.microsoft.com/office/drawing/2014/main" id="{7965B10B-9BB7-151C-C27E-6D60C3E3A9E5}"/>
+              </a:ext>
+            </a:extLst>
+          </p:cNvPr>
+          <p:cNvSpPr txBox="1"/>
+          <p:nvPr/>
+        </p:nvSpPr>
+        <p:spPr>
+          <a:xfrm>
+            <a:off x="217714" y="255046"/>
+            <a:ext cx="11756571" cy="355354"/>
+          </a:xfrm>
+          <a:prstGeom prst="rect">
+            <a:avLst/>
+          </a:prstGeom>
+          <a:noFill/>
+        </p:spPr>
+        <p:txBody>
+          <a:bodyPr wrap="square">
+            <a:spAutoFit/>
+          </a:bodyPr>
+          <a:lstStyle/>
+          <a:p>
+            <a:pPr>
+              <a:lnSpc>
+                <a:spcPct val="150000"/>
+              </a:lnSpc>
+              <a:buNone/>
+            </a:pPr>
+            <a:r>
+              <a:rPr kumimoji="0" lang="en-US" altLang="en-US" sz="1300" b="0" i="0" u="none" strike="noStrike" cap="none" normalizeH="0" baseline="0">
+                <a:ln>
+                  <a:noFill/>
+                </a:ln>
+                <a:solidFill>
+                  <a:schemeClr val="tx1"/>
+                </a:solidFill>
+                <a:effectLst/>
+                <a:latin typeface="Arial" panose="020B0604020202020204" pitchFamily="34" charset="0"/>
+              </a:rPr>
+              <a:t>.</a:t>
+            </a:r>
+          </a:p>
+        </p:txBody>
+      </p:sp>
+      <p:pic>
+        <p:nvPicPr>
+          <p:cNvPr id="4" name="Picture 3">
+            <a:extLst>
+              <a:ext uri="{FF2B5EF4-FFF2-40B4-BE49-F238E27FC236}">
+                <a16:creationId xmlns:a16="http://schemas.microsoft.com/office/drawing/2014/main" id="{D7FFDCC1-47AF-75A6-4FEA-393E22F48200}"/>
+              </a:ext>
+            </a:extLst>
+          </p:cNvPr>
+          <p:cNvPicPr>
+            <a:picLocks noChangeAspect="1"/>
+          </p:cNvPicPr>
+          <p:nvPr/>
+        </p:nvPicPr>
+        <p:blipFill>
+          <a:blip r:embed="rId2"/>
+          <a:stretch>
+            <a:fillRect/>
+          </a:stretch>
+        </p:blipFill>
+        <p:spPr>
+          <a:xfrm>
+            <a:off x="4980569" y="151464"/>
+            <a:ext cx="7211431" cy="6706536"/>
+          </a:xfrm>
+          <a:prstGeom prst="rect">
+            <a:avLst/>
+          </a:prstGeom>
+        </p:spPr>
+      </p:pic>
+    </p:spTree>
+    <p:extLst>
+      <p:ext uri="{BB962C8B-B14F-4D97-AF65-F5344CB8AC3E}">
+        <p14:creationId xmlns:p14="http://schemas.microsoft.com/office/powerpoint/2010/main" val="1492853358"/>
+      </p:ext>
+    </p:extLst>
+  </p:cSld>
+  <p:clrMapOvr>
+    <a:masterClrMapping/>
+  </p:clrMapOvr>
+</p:sld>
+</file>
+
+<file path=ppt/slides/slide19.xml><?xml version="1.0" encoding="utf-8"?>
+<p:sld xmlns:a="http://schemas.openxmlformats.org/drawingml/2006/main" xmlns:r="http://schemas.openxmlformats.org/officeDocument/2006/relationships" xmlns:p="http://schemas.openxmlformats.org/presentationml/2006/main">
+  <p:cSld>
+    <p:spTree>
+      <p:nvGrpSpPr>
+        <p:cNvPr id="1" name="">
+          <a:extLst>
+            <a:ext uri="{FF2B5EF4-FFF2-40B4-BE49-F238E27FC236}">
+              <a16:creationId xmlns:a16="http://schemas.microsoft.com/office/drawing/2014/main" id="{ECE25D7D-A080-F22B-7E8D-36EC827289A1}"/>
+            </a:ext>
+          </a:extLst>
+        </p:cNvPr>
+        <p:cNvGrpSpPr/>
+        <p:nvPr/>
+      </p:nvGrpSpPr>
+      <p:grpSpPr>
+        <a:xfrm>
+          <a:off x="0" y="0"/>
+          <a:ext cx="0" cy="0"/>
+          <a:chOff x="0" y="0"/>
+          <a:chExt cx="0" cy="0"/>
+        </a:xfrm>
+      </p:grpSpPr>
+      <p:sp>
+        <p:nvSpPr>
+          <p:cNvPr id="3" name="TextBox 2">
+            <a:extLst>
+              <a:ext uri="{FF2B5EF4-FFF2-40B4-BE49-F238E27FC236}">
+                <a16:creationId xmlns:a16="http://schemas.microsoft.com/office/drawing/2014/main" id="{E33F16A3-A6E8-401E-847B-09570DC6E4CB}"/>
+              </a:ext>
+            </a:extLst>
+          </p:cNvPr>
+          <p:cNvSpPr txBox="1"/>
+          <p:nvPr/>
+        </p:nvSpPr>
+        <p:spPr>
+          <a:xfrm>
+            <a:off x="217714" y="255046"/>
+            <a:ext cx="11756571" cy="355354"/>
+          </a:xfrm>
+          <a:prstGeom prst="rect">
+            <a:avLst/>
+          </a:prstGeom>
+          <a:noFill/>
+        </p:spPr>
+        <p:txBody>
+          <a:bodyPr wrap="square">
+            <a:spAutoFit/>
+          </a:bodyPr>
+          <a:lstStyle/>
+          <a:p>
+            <a:pPr>
+              <a:lnSpc>
+                <a:spcPct val="150000"/>
+              </a:lnSpc>
+              <a:buNone/>
+            </a:pPr>
+            <a:r>
+              <a:rPr kumimoji="0" lang="en-US" altLang="en-US" sz="1300" b="0" i="0" u="none" strike="noStrike" cap="none" normalizeH="0" baseline="0">
+                <a:ln>
+                  <a:noFill/>
+                </a:ln>
+                <a:solidFill>
+                  <a:schemeClr val="tx1"/>
+                </a:solidFill>
+                <a:effectLst/>
+                <a:latin typeface="Arial" panose="020B0604020202020204" pitchFamily="34" charset="0"/>
+              </a:rPr>
+              <a:t>.</a:t>
+            </a:r>
+          </a:p>
+        </p:txBody>
+      </p:sp>
+    </p:spTree>
+    <p:extLst>
+      <p:ext uri="{BB962C8B-B14F-4D97-AF65-F5344CB8AC3E}">
+        <p14:creationId xmlns:p14="http://schemas.microsoft.com/office/powerpoint/2010/main" val="3095838342"/>
+      </p:ext>
+    </p:extLst>
+  </p:cSld>
+  <p:clrMapOvr>
+    <a:masterClrMapping/>
+  </p:clrMapOvr>
+</p:sld>
+</file>
+
 <file path=ppt/slides/slide2.xml><?xml version="1.0" encoding="utf-8"?>
+<p:sld xmlns:a="http://schemas.openxmlformats.org/drawingml/2006/main" xmlns:r="http://schemas.openxmlformats.org/officeDocument/2006/relationships" xmlns:p="http://schemas.openxmlformats.org/presentationml/2006/main">
+  <p:cSld>
+    <p:spTree>
+      <p:nvGrpSpPr>
+        <p:cNvPr id="1" name="">
+          <a:extLst>
+            <a:ext uri="{FF2B5EF4-FFF2-40B4-BE49-F238E27FC236}">
+              <a16:creationId xmlns:a16="http://schemas.microsoft.com/office/drawing/2014/main" id="{49C215EE-00F6-704E-D615-C14F2F0ECD65}"/>
+            </a:ext>
+          </a:extLst>
+        </p:cNvPr>
+        <p:cNvGrpSpPr/>
+        <p:nvPr/>
+      </p:nvGrpSpPr>
+      <p:grpSpPr>
+        <a:xfrm>
+          <a:off x="0" y="0"/>
+          <a:ext cx="0" cy="0"/>
+          <a:chOff x="0" y="0"/>
+          <a:chExt cx="0" cy="0"/>
+        </a:xfrm>
+      </p:grpSpPr>
+      <p:sp>
+        <p:nvSpPr>
+          <p:cNvPr id="3" name="TextBox 2">
+            <a:extLst>
+              <a:ext uri="{FF2B5EF4-FFF2-40B4-BE49-F238E27FC236}">
+                <a16:creationId xmlns:a16="http://schemas.microsoft.com/office/drawing/2014/main" id="{78625B29-2A24-70D2-B4E5-0FBC38D22BD3}"/>
+              </a:ext>
+            </a:extLst>
+          </p:cNvPr>
+          <p:cNvSpPr txBox="1"/>
+          <p:nvPr/>
+        </p:nvSpPr>
+        <p:spPr>
+          <a:xfrm>
+            <a:off x="217714" y="255046"/>
+            <a:ext cx="11756571" cy="355354"/>
+          </a:xfrm>
+          <a:prstGeom prst="rect">
+            <a:avLst/>
+          </a:prstGeom>
+          <a:noFill/>
+        </p:spPr>
+        <p:txBody>
+          <a:bodyPr wrap="square">
+            <a:spAutoFit/>
+          </a:bodyPr>
+          <a:lstStyle/>
+          <a:p>
+            <a:pPr>
+              <a:lnSpc>
+                <a:spcPct val="150000"/>
+              </a:lnSpc>
+              <a:buNone/>
+            </a:pPr>
+            <a:r>
+              <a:rPr lang="en-US" altLang="en-US" sz="1300">
+                <a:latin typeface="Arial" panose="020B0604020202020204" pitchFamily="34" charset="0"/>
+              </a:rPr>
+              <a:t>CTRL + C ,   CTRL - V</a:t>
+            </a:r>
+            <a:endParaRPr kumimoji="0" lang="en-US" altLang="en-US" sz="1300" b="0" i="0" u="none" strike="noStrike" cap="none" normalizeH="0" baseline="0">
+              <a:ln>
+                <a:noFill/>
+              </a:ln>
+              <a:solidFill>
+                <a:schemeClr val="tx1"/>
+              </a:solidFill>
+              <a:effectLst/>
+              <a:latin typeface="Arial" panose="020B0604020202020204" pitchFamily="34" charset="0"/>
+            </a:endParaRPr>
+          </a:p>
+        </p:txBody>
+      </p:sp>
+      <p:pic>
+        <p:nvPicPr>
+          <p:cNvPr id="4" name="Picture 3">
+            <a:extLst>
+              <a:ext uri="{FF2B5EF4-FFF2-40B4-BE49-F238E27FC236}">
+                <a16:creationId xmlns:a16="http://schemas.microsoft.com/office/drawing/2014/main" id="{FE4CC97B-8D8E-B29E-9CB5-F964ACC2A94A}"/>
+              </a:ext>
+            </a:extLst>
+          </p:cNvPr>
+          <p:cNvPicPr>
+            <a:picLocks noChangeAspect="1"/>
+          </p:cNvPicPr>
+          <p:nvPr/>
+        </p:nvPicPr>
+        <p:blipFill>
+          <a:blip r:embed="rId2"/>
+          <a:stretch>
+            <a:fillRect/>
+          </a:stretch>
+        </p:blipFill>
+        <p:spPr>
+          <a:xfrm>
+            <a:off x="9633615" y="0"/>
+            <a:ext cx="2558385" cy="6858000"/>
+          </a:xfrm>
+          <a:prstGeom prst="rect">
+            <a:avLst/>
+          </a:prstGeom>
+        </p:spPr>
+      </p:pic>
+    </p:spTree>
+    <p:extLst>
+      <p:ext uri="{BB962C8B-B14F-4D97-AF65-F5344CB8AC3E}">
+        <p14:creationId xmlns:p14="http://schemas.microsoft.com/office/powerpoint/2010/main" val="3967494901"/>
+      </p:ext>
+    </p:extLst>
+  </p:cSld>
+  <p:clrMapOvr>
+    <a:masterClrMapping/>
+  </p:clrMapOvr>
+</p:sld>
+</file>
+
+<file path=ppt/slides/slide20.xml><?xml version="1.0" encoding="utf-8"?>
+<p:sld xmlns:a="http://schemas.openxmlformats.org/drawingml/2006/main" xmlns:r="http://schemas.openxmlformats.org/officeDocument/2006/relationships" xmlns:p="http://schemas.openxmlformats.org/presentationml/2006/main">
+  <p:cSld>
+    <p:spTree>
+      <p:nvGrpSpPr>
+        <p:cNvPr id="1" name="">
+          <a:extLst>
+            <a:ext uri="{FF2B5EF4-FFF2-40B4-BE49-F238E27FC236}">
+              <a16:creationId xmlns:a16="http://schemas.microsoft.com/office/drawing/2014/main" id="{3F721B6C-C31E-7C57-404E-AE2B12FE420B}"/>
+            </a:ext>
+          </a:extLst>
+        </p:cNvPr>
+        <p:cNvGrpSpPr/>
+        <p:nvPr/>
+      </p:nvGrpSpPr>
+      <p:grpSpPr>
+        <a:xfrm>
+          <a:off x="0" y="0"/>
+          <a:ext cx="0" cy="0"/>
+          <a:chOff x="0" y="0"/>
+          <a:chExt cx="0" cy="0"/>
+        </a:xfrm>
+      </p:grpSpPr>
+      <p:sp>
+        <p:nvSpPr>
+          <p:cNvPr id="3" name="TextBox 2">
+            <a:extLst>
+              <a:ext uri="{FF2B5EF4-FFF2-40B4-BE49-F238E27FC236}">
+                <a16:creationId xmlns:a16="http://schemas.microsoft.com/office/drawing/2014/main" id="{E4AFB857-F9D5-BAC7-5FCD-40FFD1ADE3A9}"/>
+              </a:ext>
+            </a:extLst>
+          </p:cNvPr>
+          <p:cNvSpPr txBox="1"/>
+          <p:nvPr/>
+        </p:nvSpPr>
+        <p:spPr>
+          <a:xfrm>
+            <a:off x="217714" y="255046"/>
+            <a:ext cx="11756571" cy="355354"/>
+          </a:xfrm>
+          <a:prstGeom prst="rect">
+            <a:avLst/>
+          </a:prstGeom>
+          <a:noFill/>
+        </p:spPr>
+        <p:txBody>
+          <a:bodyPr wrap="square">
+            <a:spAutoFit/>
+          </a:bodyPr>
+          <a:lstStyle/>
+          <a:p>
+            <a:pPr>
+              <a:lnSpc>
+                <a:spcPct val="150000"/>
+              </a:lnSpc>
+              <a:buNone/>
+            </a:pPr>
+            <a:r>
+              <a:rPr kumimoji="0" lang="en-US" altLang="en-US" sz="1300" b="0" i="0" u="none" strike="noStrike" cap="none" normalizeH="0" baseline="0">
+                <a:ln>
+                  <a:noFill/>
+                </a:ln>
+                <a:solidFill>
+                  <a:schemeClr val="tx1"/>
+                </a:solidFill>
+                <a:effectLst/>
+                <a:latin typeface="Arial" panose="020B0604020202020204" pitchFamily="34" charset="0"/>
+              </a:rPr>
+              <a:t>.</a:t>
+            </a:r>
+          </a:p>
+        </p:txBody>
+      </p:sp>
+    </p:spTree>
+    <p:extLst>
+      <p:ext uri="{BB962C8B-B14F-4D97-AF65-F5344CB8AC3E}">
+        <p14:creationId xmlns:p14="http://schemas.microsoft.com/office/powerpoint/2010/main" val="1456741033"/>
+      </p:ext>
+    </p:extLst>
+  </p:cSld>
+  <p:clrMapOvr>
+    <a:masterClrMapping/>
+  </p:clrMapOvr>
+</p:sld>
+</file>
+
+<file path=ppt/slides/slide3.xml><?xml version="1.0" encoding="utf-8"?>
+<p:sld xmlns:a="http://schemas.openxmlformats.org/drawingml/2006/main" xmlns:r="http://schemas.openxmlformats.org/officeDocument/2006/relationships" xmlns:p="http://schemas.openxmlformats.org/presentationml/2006/main">
+  <p:cSld>
+    <p:spTree>
+      <p:nvGrpSpPr>
+        <p:cNvPr id="1" name="">
+          <a:extLst>
+            <a:ext uri="{FF2B5EF4-FFF2-40B4-BE49-F238E27FC236}">
+              <a16:creationId xmlns:a16="http://schemas.microsoft.com/office/drawing/2014/main" id="{00CE48EE-121F-B970-A975-91FA2BD123F6}"/>
+            </a:ext>
+          </a:extLst>
+        </p:cNvPr>
+        <p:cNvGrpSpPr/>
+        <p:nvPr/>
+      </p:nvGrpSpPr>
+      <p:grpSpPr>
+        <a:xfrm>
+          <a:off x="0" y="0"/>
+          <a:ext cx="0" cy="0"/>
+          <a:chOff x="0" y="0"/>
+          <a:chExt cx="0" cy="0"/>
+        </a:xfrm>
+      </p:grpSpPr>
+      <p:sp>
+        <p:nvSpPr>
+          <p:cNvPr id="3" name="TextBox 2">
+            <a:extLst>
+              <a:ext uri="{FF2B5EF4-FFF2-40B4-BE49-F238E27FC236}">
+                <a16:creationId xmlns:a16="http://schemas.microsoft.com/office/drawing/2014/main" id="{8FE95272-BFDE-A47F-944A-374A09DB4AA0}"/>
+              </a:ext>
+            </a:extLst>
+          </p:cNvPr>
+          <p:cNvSpPr txBox="1"/>
+          <p:nvPr/>
+        </p:nvSpPr>
+        <p:spPr>
+          <a:xfrm>
+            <a:off x="217714" y="255046"/>
+            <a:ext cx="11756571" cy="355354"/>
+          </a:xfrm>
+          <a:prstGeom prst="rect">
+            <a:avLst/>
+          </a:prstGeom>
+          <a:noFill/>
+        </p:spPr>
+        <p:txBody>
+          <a:bodyPr wrap="square">
+            <a:spAutoFit/>
+          </a:bodyPr>
+          <a:lstStyle/>
+          <a:p>
+            <a:pPr>
+              <a:lnSpc>
+                <a:spcPct val="150000"/>
+              </a:lnSpc>
+              <a:buNone/>
+            </a:pPr>
+            <a:r>
+              <a:rPr kumimoji="0" lang="en-US" altLang="en-US" sz="1300" b="0" i="0" u="none" strike="noStrike" cap="none" normalizeH="0" baseline="0">
+                <a:ln>
+                  <a:noFill/>
+                </a:ln>
+                <a:solidFill>
+                  <a:schemeClr val="tx1"/>
+                </a:solidFill>
+                <a:effectLst/>
+                <a:latin typeface="Arial" panose="020B0604020202020204" pitchFamily="34" charset="0"/>
+              </a:rPr>
+              <a:t>.</a:t>
+            </a:r>
+          </a:p>
+        </p:txBody>
+      </p:sp>
+      <p:pic>
+        <p:nvPicPr>
+          <p:cNvPr id="4" name="Picture 3">
+            <a:extLst>
+              <a:ext uri="{FF2B5EF4-FFF2-40B4-BE49-F238E27FC236}">
+                <a16:creationId xmlns:a16="http://schemas.microsoft.com/office/drawing/2014/main" id="{2BCFBC90-2CF7-F79D-3FA3-B4C56010C0D5}"/>
+              </a:ext>
+            </a:extLst>
+          </p:cNvPr>
+          <p:cNvPicPr>
+            <a:picLocks noChangeAspect="1"/>
+          </p:cNvPicPr>
+          <p:nvPr/>
+        </p:nvPicPr>
+        <p:blipFill>
+          <a:blip r:embed="rId2"/>
+          <a:stretch>
+            <a:fillRect/>
+          </a:stretch>
+        </p:blipFill>
+        <p:spPr>
+          <a:xfrm>
+            <a:off x="2989316" y="0"/>
+            <a:ext cx="9202684" cy="6858000"/>
+          </a:xfrm>
+          <a:prstGeom prst="rect">
+            <a:avLst/>
+          </a:prstGeom>
+        </p:spPr>
+      </p:pic>
+    </p:spTree>
+    <p:extLst>
+      <p:ext uri="{BB962C8B-B14F-4D97-AF65-F5344CB8AC3E}">
+        <p14:creationId xmlns:p14="http://schemas.microsoft.com/office/powerpoint/2010/main" val="941904683"/>
+      </p:ext>
+    </p:extLst>
+  </p:cSld>
+  <p:clrMapOvr>
+    <a:masterClrMapping/>
+  </p:clrMapOvr>
+</p:sld>
+</file>
+
+<file path=ppt/slides/slide4.xml><?xml version="1.0" encoding="utf-8"?>
+<p:sld xmlns:a="http://schemas.openxmlformats.org/drawingml/2006/main" xmlns:r="http://schemas.openxmlformats.org/officeDocument/2006/relationships" xmlns:p="http://schemas.openxmlformats.org/presentationml/2006/main">
+  <p:cSld>
+    <p:spTree>
+      <p:nvGrpSpPr>
+        <p:cNvPr id="1" name="">
+          <a:extLst>
+            <a:ext uri="{FF2B5EF4-FFF2-40B4-BE49-F238E27FC236}">
+              <a16:creationId xmlns:a16="http://schemas.microsoft.com/office/drawing/2014/main" id="{F9E3632B-FB0E-3475-523A-06E5A1784414}"/>
+            </a:ext>
+          </a:extLst>
+        </p:cNvPr>
+        <p:cNvGrpSpPr/>
+        <p:nvPr/>
+      </p:nvGrpSpPr>
+      <p:grpSpPr>
+        <a:xfrm>
+          <a:off x="0" y="0"/>
+          <a:ext cx="0" cy="0"/>
+          <a:chOff x="0" y="0"/>
+          <a:chExt cx="0" cy="0"/>
+        </a:xfrm>
+      </p:grpSpPr>
+      <p:sp>
+        <p:nvSpPr>
+          <p:cNvPr id="3" name="TextBox 2">
+            <a:extLst>
+              <a:ext uri="{FF2B5EF4-FFF2-40B4-BE49-F238E27FC236}">
+                <a16:creationId xmlns:a16="http://schemas.microsoft.com/office/drawing/2014/main" id="{ADA780B6-6BB1-70DF-0378-E878891E38BA}"/>
+              </a:ext>
+            </a:extLst>
+          </p:cNvPr>
+          <p:cNvSpPr txBox="1"/>
+          <p:nvPr/>
+        </p:nvSpPr>
+        <p:spPr>
+          <a:xfrm>
+            <a:off x="217714" y="255046"/>
+            <a:ext cx="11756571" cy="355354"/>
+          </a:xfrm>
+          <a:prstGeom prst="rect">
+            <a:avLst/>
+          </a:prstGeom>
+          <a:noFill/>
+        </p:spPr>
+        <p:txBody>
+          <a:bodyPr wrap="square">
+            <a:spAutoFit/>
+          </a:bodyPr>
+          <a:lstStyle/>
+          <a:p>
+            <a:pPr>
+              <a:lnSpc>
+                <a:spcPct val="150000"/>
+              </a:lnSpc>
+              <a:buNone/>
+            </a:pPr>
+            <a:r>
+              <a:rPr kumimoji="0" lang="en-US" altLang="en-US" sz="1300" b="0" i="0" u="none" strike="noStrike" cap="none" normalizeH="0" baseline="0">
+                <a:ln>
+                  <a:noFill/>
+                </a:ln>
+                <a:solidFill>
+                  <a:schemeClr val="tx1"/>
+                </a:solidFill>
+                <a:effectLst/>
+                <a:latin typeface="Arial" panose="020B0604020202020204" pitchFamily="34" charset="0"/>
+              </a:rPr>
+              <a:t>.</a:t>
+            </a:r>
+          </a:p>
+        </p:txBody>
+      </p:sp>
+      <p:pic>
+        <p:nvPicPr>
+          <p:cNvPr id="4" name="Picture 3">
+            <a:extLst>
+              <a:ext uri="{FF2B5EF4-FFF2-40B4-BE49-F238E27FC236}">
+                <a16:creationId xmlns:a16="http://schemas.microsoft.com/office/drawing/2014/main" id="{4522A06F-48E4-C0F1-DD25-19B600E4226E}"/>
+              </a:ext>
+            </a:extLst>
+          </p:cNvPr>
+          <p:cNvPicPr>
+            <a:picLocks noChangeAspect="1"/>
+          </p:cNvPicPr>
+          <p:nvPr/>
+        </p:nvPicPr>
+        <p:blipFill>
+          <a:blip r:embed="rId2"/>
+          <a:stretch>
+            <a:fillRect/>
+          </a:stretch>
+        </p:blipFill>
+        <p:spPr>
+          <a:xfrm>
+            <a:off x="1766283" y="2495419"/>
+            <a:ext cx="8659433" cy="1867161"/>
+          </a:xfrm>
+          <a:prstGeom prst="rect">
+            <a:avLst/>
+          </a:prstGeom>
+        </p:spPr>
+      </p:pic>
+    </p:spTree>
+    <p:extLst>
+      <p:ext uri="{BB962C8B-B14F-4D97-AF65-F5344CB8AC3E}">
+        <p14:creationId xmlns:p14="http://schemas.microsoft.com/office/powerpoint/2010/main" val="2720084203"/>
+      </p:ext>
+    </p:extLst>
+  </p:cSld>
+  <p:clrMapOvr>
+    <a:masterClrMapping/>
+  </p:clrMapOvr>
+</p:sld>
+</file>
+
+<file path=ppt/slides/slide5.xml><?xml version="1.0" encoding="utf-8"?>
 <p:sld xmlns:a="http://schemas.openxmlformats.org/drawingml/2006/main" xmlns:r="http://schemas.openxmlformats.org/officeDocument/2006/relationships" xmlns:p="http://schemas.openxmlformats.org/presentationml/2006/main">
   <p:cSld>
     <p:spTree>
@@ -3455,21 +5848,54 @@
               <a:buNone/>
             </a:pPr>
             <a:r>
-              <a:rPr kumimoji="0" lang="en-US" altLang="en-US" sz="1300" b="0" i="0" u="none" strike="noStrike" cap="none" normalizeH="0" baseline="0">
-                <a:ln>
-                  <a:noFill/>
-                </a:ln>
-                <a:solidFill>
-                  <a:schemeClr val="tx1"/>
-                </a:solidFill>
-                <a:effectLst/>
-                <a:latin typeface="Arial" panose="020B0604020202020204" pitchFamily="34" charset="0"/>
-              </a:rPr>
-              <a:t>.</a:t>
-            </a:r>
-          </a:p>
-        </p:txBody>
-      </p:sp>
+              <a:rPr lang="en-US" altLang="en-US" sz="1300">
+                <a:latin typeface="Arial" panose="020B0604020202020204" pitchFamily="34" charset="0"/>
+              </a:rPr>
+              <a:t>app\Http\Controllers\Backend\ChildCategoryController.php</a:t>
+            </a:r>
+            <a:endParaRPr kumimoji="0" lang="en-US" altLang="en-US" sz="1300" b="0" i="0" u="none" strike="noStrike" cap="none" normalizeH="0" baseline="0">
+              <a:ln>
+                <a:noFill/>
+              </a:ln>
+              <a:solidFill>
+                <a:schemeClr val="tx1"/>
+              </a:solidFill>
+              <a:effectLst/>
+              <a:latin typeface="Arial" panose="020B0604020202020204" pitchFamily="34" charset="0"/>
+            </a:endParaRPr>
+          </a:p>
+        </p:txBody>
+      </p:sp>
+      <p:pic>
+        <p:nvPicPr>
+          <p:cNvPr id="4" name="Picture 3">
+            <a:extLst>
+              <a:ext uri="{FF2B5EF4-FFF2-40B4-BE49-F238E27FC236}">
+                <a16:creationId xmlns:a16="http://schemas.microsoft.com/office/drawing/2014/main" id="{9AD4839F-BDE2-37FC-1116-5250DFB1845C}"/>
+              </a:ext>
+            </a:extLst>
+          </p:cNvPr>
+          <p:cNvPicPr>
+            <a:picLocks noChangeAspect="1"/>
+          </p:cNvPicPr>
+          <p:nvPr/>
+        </p:nvPicPr>
+        <p:blipFill>
+          <a:blip r:embed="rId2"/>
+          <a:stretch>
+            <a:fillRect/>
+          </a:stretch>
+        </p:blipFill>
+        <p:spPr>
+          <a:xfrm>
+            <a:off x="7673962" y="0"/>
+            <a:ext cx="4518038" cy="6858000"/>
+          </a:xfrm>
+          <a:prstGeom prst="rect">
+            <a:avLst/>
+          </a:prstGeom>
+        </p:spPr>
+      </p:pic>
     </p:spTree>
     <p:extLst>
       <p:ext uri="{BB962C8B-B14F-4D97-AF65-F5344CB8AC3E}">
@@ -3483,7 +5909,7 @@
 </p:sld>
 </file>
 
-<file path=ppt/slides/slide3.xml><?xml version="1.0" encoding="utf-8"?>
+<file path=ppt/slides/slide6.xml><?xml version="1.0" encoding="utf-8"?>
 <p:sld xmlns:a="http://schemas.openxmlformats.org/drawingml/2006/main" xmlns:r="http://schemas.openxmlformats.org/officeDocument/2006/relationships" xmlns:p="http://schemas.openxmlformats.org/presentationml/2006/main">
   <p:cSld>
     <p:spTree>
@@ -3491,7 +5917,7 @@
         <p:cNvPr id="1" name="">
           <a:extLst>
             <a:ext uri="{FF2B5EF4-FFF2-40B4-BE49-F238E27FC236}">
-              <a16:creationId xmlns:a16="http://schemas.microsoft.com/office/drawing/2014/main" id="{ECE25D7D-A080-F22B-7E8D-36EC827289A1}"/>
+              <a16:creationId xmlns:a16="http://schemas.microsoft.com/office/drawing/2014/main" id="{AACC25DA-8163-4169-0673-F3865FC95A9C}"/>
             </a:ext>
           </a:extLst>
         </p:cNvPr>
@@ -3511,7 +5937,7 @@
           <p:cNvPr id="3" name="TextBox 2">
             <a:extLst>
               <a:ext uri="{FF2B5EF4-FFF2-40B4-BE49-F238E27FC236}">
-                <a16:creationId xmlns:a16="http://schemas.microsoft.com/office/drawing/2014/main" id="{E33F16A3-A6E8-401E-847B-09570DC6E4CB}"/>
+                <a16:creationId xmlns:a16="http://schemas.microsoft.com/office/drawing/2014/main" id="{A07C4E8D-B0D7-41F2-F1D8-2B5B23858C78}"/>
               </a:ext>
             </a:extLst>
           </p:cNvPr>
@@ -3541,6 +5967,290 @@
               <a:buNone/>
             </a:pPr>
             <a:r>
+              <a:rPr lang="en-US" altLang="en-US" sz="1300">
+                <a:latin typeface="Arial" panose="020B0604020202020204" pitchFamily="34" charset="0"/>
+              </a:rPr>
+              <a:t>resources\views\admin\layouts\sidebar.blade.php</a:t>
+            </a:r>
+            <a:endParaRPr kumimoji="0" lang="en-US" altLang="en-US" sz="1300" b="0" i="0" u="none" strike="noStrike" cap="none" normalizeH="0" baseline="0">
+              <a:ln>
+                <a:noFill/>
+              </a:ln>
+              <a:solidFill>
+                <a:schemeClr val="tx1"/>
+              </a:solidFill>
+              <a:effectLst/>
+              <a:latin typeface="Arial" panose="020B0604020202020204" pitchFamily="34" charset="0"/>
+            </a:endParaRPr>
+          </a:p>
+        </p:txBody>
+      </p:sp>
+      <p:pic>
+        <p:nvPicPr>
+          <p:cNvPr id="4" name="Picture 3">
+            <a:extLst>
+              <a:ext uri="{FF2B5EF4-FFF2-40B4-BE49-F238E27FC236}">
+                <a16:creationId xmlns:a16="http://schemas.microsoft.com/office/drawing/2014/main" id="{419CF479-A400-990E-692F-8207689B6E43}"/>
+              </a:ext>
+            </a:extLst>
+          </p:cNvPr>
+          <p:cNvPicPr>
+            <a:picLocks noChangeAspect="1"/>
+          </p:cNvPicPr>
+          <p:nvPr/>
+        </p:nvPicPr>
+        <p:blipFill>
+          <a:blip r:embed="rId2"/>
+          <a:stretch>
+            <a:fillRect/>
+          </a:stretch>
+        </p:blipFill>
+        <p:spPr>
+          <a:xfrm>
+            <a:off x="3398982" y="1519132"/>
+            <a:ext cx="8793018" cy="5338868"/>
+          </a:xfrm>
+          <a:prstGeom prst="rect">
+            <a:avLst/>
+          </a:prstGeom>
+        </p:spPr>
+      </p:pic>
+    </p:spTree>
+    <p:extLst>
+      <p:ext uri="{BB962C8B-B14F-4D97-AF65-F5344CB8AC3E}">
+        <p14:creationId xmlns:p14="http://schemas.microsoft.com/office/powerpoint/2010/main" val="3831936364"/>
+      </p:ext>
+    </p:extLst>
+  </p:cSld>
+  <p:clrMapOvr>
+    <a:masterClrMapping/>
+  </p:clrMapOvr>
+</p:sld>
+</file>
+
+<file path=ppt/slides/slide7.xml><?xml version="1.0" encoding="utf-8"?>
+<p:sld xmlns:a="http://schemas.openxmlformats.org/drawingml/2006/main" xmlns:r="http://schemas.openxmlformats.org/officeDocument/2006/relationships" xmlns:p="http://schemas.openxmlformats.org/presentationml/2006/main">
+  <p:cSld>
+    <p:spTree>
+      <p:nvGrpSpPr>
+        <p:cNvPr id="1" name="">
+          <a:extLst>
+            <a:ext uri="{FF2B5EF4-FFF2-40B4-BE49-F238E27FC236}">
+              <a16:creationId xmlns:a16="http://schemas.microsoft.com/office/drawing/2014/main" id="{9242F7F7-223C-F34A-D09E-8AC053EF8CF2}"/>
+            </a:ext>
+          </a:extLst>
+        </p:cNvPr>
+        <p:cNvGrpSpPr/>
+        <p:nvPr/>
+      </p:nvGrpSpPr>
+      <p:grpSpPr>
+        <a:xfrm>
+          <a:off x="0" y="0"/>
+          <a:ext cx="0" cy="0"/>
+          <a:chOff x="0" y="0"/>
+          <a:chExt cx="0" cy="0"/>
+        </a:xfrm>
+      </p:grpSpPr>
+      <p:sp>
+        <p:nvSpPr>
+          <p:cNvPr id="3" name="TextBox 2">
+            <a:extLst>
+              <a:ext uri="{FF2B5EF4-FFF2-40B4-BE49-F238E27FC236}">
+                <a16:creationId xmlns:a16="http://schemas.microsoft.com/office/drawing/2014/main" id="{AAF087A8-62E5-5648-03E3-6D51B974FF0B}"/>
+              </a:ext>
+            </a:extLst>
+          </p:cNvPr>
+          <p:cNvSpPr txBox="1"/>
+          <p:nvPr/>
+        </p:nvSpPr>
+        <p:spPr>
+          <a:xfrm>
+            <a:off x="217714" y="255046"/>
+            <a:ext cx="11756571" cy="1255600"/>
+          </a:xfrm>
+          <a:prstGeom prst="rect">
+            <a:avLst/>
+          </a:prstGeom>
+          <a:noFill/>
+        </p:spPr>
+        <p:txBody>
+          <a:bodyPr wrap="square">
+            <a:spAutoFit/>
+          </a:bodyPr>
+          <a:lstStyle/>
+          <a:p>
+            <a:pPr>
+              <a:lnSpc>
+                <a:spcPct val="150000"/>
+              </a:lnSpc>
+              <a:buNone/>
+            </a:pPr>
+            <a:r>
+              <a:rPr lang="en-US" altLang="en-US" sz="1300" b="1">
+                <a:latin typeface="Arial" panose="020B0604020202020204" pitchFamily="34" charset="0"/>
+              </a:rPr>
+              <a:t>resources\views\admin\</a:t>
+            </a:r>
+            <a:r>
+              <a:rPr lang="en-US" altLang="en-US" sz="1300" b="1" u="sng">
+                <a:latin typeface="Arial" panose="020B0604020202020204" pitchFamily="34" charset="0"/>
+              </a:rPr>
+              <a:t>child-category\index.blade.php</a:t>
+            </a:r>
+            <a:endParaRPr lang="en-US" altLang="en-US" sz="1300" b="1">
+              <a:latin typeface="Arial" panose="020B0604020202020204" pitchFamily="34" charset="0"/>
+            </a:endParaRPr>
+          </a:p>
+          <a:p>
+            <a:pPr>
+              <a:lnSpc>
+                <a:spcPct val="150000"/>
+              </a:lnSpc>
+              <a:buNone/>
+            </a:pPr>
+            <a:endParaRPr kumimoji="0" lang="en-US" altLang="en-US" sz="1300" b="0" i="0" strike="noStrike" cap="none" normalizeH="0" baseline="0">
+              <a:ln>
+                <a:noFill/>
+              </a:ln>
+              <a:solidFill>
+                <a:schemeClr val="tx1"/>
+              </a:solidFill>
+              <a:effectLst/>
+              <a:latin typeface="Arial" panose="020B0604020202020204" pitchFamily="34" charset="0"/>
+            </a:endParaRPr>
+          </a:p>
+          <a:p>
+            <a:pPr>
+              <a:lnSpc>
+                <a:spcPct val="150000"/>
+              </a:lnSpc>
+              <a:buNone/>
+            </a:pPr>
+            <a:endParaRPr lang="en-US" altLang="en-US" sz="1300">
+              <a:latin typeface="Arial" panose="020B0604020202020204" pitchFamily="34" charset="0"/>
+            </a:endParaRPr>
+          </a:p>
+          <a:p>
+            <a:pPr>
+              <a:lnSpc>
+                <a:spcPct val="150000"/>
+              </a:lnSpc>
+              <a:buNone/>
+            </a:pPr>
+            <a:endParaRPr kumimoji="0" lang="en-US" altLang="en-US" sz="1300" b="0" i="0" strike="noStrike" cap="none" normalizeH="0" baseline="0">
+              <a:ln>
+                <a:noFill/>
+              </a:ln>
+              <a:solidFill>
+                <a:schemeClr val="tx1"/>
+              </a:solidFill>
+              <a:effectLst/>
+              <a:latin typeface="Arial" panose="020B0604020202020204" pitchFamily="34" charset="0"/>
+            </a:endParaRPr>
+          </a:p>
+        </p:txBody>
+      </p:sp>
+      <p:pic>
+        <p:nvPicPr>
+          <p:cNvPr id="4" name="Picture 3">
+            <a:extLst>
+              <a:ext uri="{FF2B5EF4-FFF2-40B4-BE49-F238E27FC236}">
+                <a16:creationId xmlns:a16="http://schemas.microsoft.com/office/drawing/2014/main" id="{361595B7-022B-1DAB-D4B6-B50CD7E4C7B7}"/>
+              </a:ext>
+            </a:extLst>
+          </p:cNvPr>
+          <p:cNvPicPr>
+            <a:picLocks noChangeAspect="1"/>
+          </p:cNvPicPr>
+          <p:nvPr/>
+        </p:nvPicPr>
+        <p:blipFill>
+          <a:blip r:embed="rId2"/>
+          <a:stretch>
+            <a:fillRect/>
+          </a:stretch>
+        </p:blipFill>
+        <p:spPr>
+          <a:xfrm>
+            <a:off x="5720366" y="0"/>
+            <a:ext cx="6471634" cy="6858000"/>
+          </a:xfrm>
+          <a:prstGeom prst="rect">
+            <a:avLst/>
+          </a:prstGeom>
+        </p:spPr>
+      </p:pic>
+    </p:spTree>
+    <p:extLst>
+      <p:ext uri="{BB962C8B-B14F-4D97-AF65-F5344CB8AC3E}">
+        <p14:creationId xmlns:p14="http://schemas.microsoft.com/office/powerpoint/2010/main" val="4013881629"/>
+      </p:ext>
+    </p:extLst>
+  </p:cSld>
+  <p:clrMapOvr>
+    <a:masterClrMapping/>
+  </p:clrMapOvr>
+</p:sld>
+</file>
+
+<file path=ppt/slides/slide8.xml><?xml version="1.0" encoding="utf-8"?>
+<p:sld xmlns:a="http://schemas.openxmlformats.org/drawingml/2006/main" xmlns:r="http://schemas.openxmlformats.org/officeDocument/2006/relationships" xmlns:p="http://schemas.openxmlformats.org/presentationml/2006/main">
+  <p:cSld>
+    <p:spTree>
+      <p:nvGrpSpPr>
+        <p:cNvPr id="1" name="">
+          <a:extLst>
+            <a:ext uri="{FF2B5EF4-FFF2-40B4-BE49-F238E27FC236}">
+              <a16:creationId xmlns:a16="http://schemas.microsoft.com/office/drawing/2014/main" id="{6E69523C-081E-4D8B-A4F0-BF26CF9E00FC}"/>
+            </a:ext>
+          </a:extLst>
+        </p:cNvPr>
+        <p:cNvGrpSpPr/>
+        <p:nvPr/>
+      </p:nvGrpSpPr>
+      <p:grpSpPr>
+        <a:xfrm>
+          <a:off x="0" y="0"/>
+          <a:ext cx="0" cy="0"/>
+          <a:chOff x="0" y="0"/>
+          <a:chExt cx="0" cy="0"/>
+        </a:xfrm>
+      </p:grpSpPr>
+      <p:sp>
+        <p:nvSpPr>
+          <p:cNvPr id="3" name="TextBox 2">
+            <a:extLst>
+              <a:ext uri="{FF2B5EF4-FFF2-40B4-BE49-F238E27FC236}">
+                <a16:creationId xmlns:a16="http://schemas.microsoft.com/office/drawing/2014/main" id="{EC0C6D9C-31B0-CA0F-EF9E-61984983764B}"/>
+              </a:ext>
+            </a:extLst>
+          </p:cNvPr>
+          <p:cNvSpPr txBox="1"/>
+          <p:nvPr/>
+        </p:nvSpPr>
+        <p:spPr>
+          <a:xfrm>
+            <a:off x="217714" y="255046"/>
+            <a:ext cx="11756571" cy="355354"/>
+          </a:xfrm>
+          <a:prstGeom prst="rect">
+            <a:avLst/>
+          </a:prstGeom>
+          <a:noFill/>
+        </p:spPr>
+        <p:txBody>
+          <a:bodyPr wrap="square">
+            <a:spAutoFit/>
+          </a:bodyPr>
+          <a:lstStyle/>
+          <a:p>
+            <a:pPr>
+              <a:lnSpc>
+                <a:spcPct val="150000"/>
+              </a:lnSpc>
+              <a:buNone/>
+            </a:pPr>
+            <a:r>
               <a:rPr kumimoji="0" lang="en-US" altLang="en-US" sz="1300" b="0" i="0" u="none" strike="noStrike" cap="none" normalizeH="0" baseline="0">
                 <a:ln>
                   <a:noFill/>
@@ -3556,10 +6266,315 @@
           </a:p>
         </p:txBody>
       </p:sp>
+      <p:pic>
+        <p:nvPicPr>
+          <p:cNvPr id="4" name="Picture 3">
+            <a:extLst>
+              <a:ext uri="{FF2B5EF4-FFF2-40B4-BE49-F238E27FC236}">
+                <a16:creationId xmlns:a16="http://schemas.microsoft.com/office/drawing/2014/main" id="{F9A8287E-EFF7-C24C-29CA-7920837F9F4F}"/>
+              </a:ext>
+            </a:extLst>
+          </p:cNvPr>
+          <p:cNvPicPr>
+            <a:picLocks noChangeAspect="1"/>
+          </p:cNvPicPr>
+          <p:nvPr/>
+        </p:nvPicPr>
+        <p:blipFill>
+          <a:blip r:embed="rId2"/>
+          <a:stretch>
+            <a:fillRect/>
+          </a:stretch>
+        </p:blipFill>
+        <p:spPr>
+          <a:xfrm>
+            <a:off x="7205725" y="0"/>
+            <a:ext cx="4986275" cy="6858000"/>
+          </a:xfrm>
+          <a:prstGeom prst="rect">
+            <a:avLst/>
+          </a:prstGeom>
+        </p:spPr>
+      </p:pic>
     </p:spTree>
     <p:extLst>
       <p:ext uri="{BB962C8B-B14F-4D97-AF65-F5344CB8AC3E}">
-        <p14:creationId xmlns:p14="http://schemas.microsoft.com/office/powerpoint/2010/main" val="3095838342"/>
+        <p14:creationId xmlns:p14="http://schemas.microsoft.com/office/powerpoint/2010/main" val="2442720437"/>
+      </p:ext>
+    </p:extLst>
+  </p:cSld>
+  <p:clrMapOvr>
+    <a:masterClrMapping/>
+  </p:clrMapOvr>
+</p:sld>
+</file>
+
+<file path=ppt/slides/slide9.xml><?xml version="1.0" encoding="utf-8"?>
+<p:sld xmlns:a="http://schemas.openxmlformats.org/drawingml/2006/main" xmlns:r="http://schemas.openxmlformats.org/officeDocument/2006/relationships" xmlns:p="http://schemas.openxmlformats.org/presentationml/2006/main">
+  <p:cSld>
+    <p:spTree>
+      <p:nvGrpSpPr>
+        <p:cNvPr id="1" name="">
+          <a:extLst>
+            <a:ext uri="{FF2B5EF4-FFF2-40B4-BE49-F238E27FC236}">
+              <a16:creationId xmlns:a16="http://schemas.microsoft.com/office/drawing/2014/main" id="{C52AA836-528A-E95A-E7ED-BDB67E50BA78}"/>
+            </a:ext>
+          </a:extLst>
+        </p:cNvPr>
+        <p:cNvGrpSpPr/>
+        <p:nvPr/>
+      </p:nvGrpSpPr>
+      <p:grpSpPr>
+        <a:xfrm>
+          <a:off x="0" y="0"/>
+          <a:ext cx="0" cy="0"/>
+          <a:chOff x="0" y="0"/>
+          <a:chExt cx="0" cy="0"/>
+        </a:xfrm>
+      </p:grpSpPr>
+      <p:sp>
+        <p:nvSpPr>
+          <p:cNvPr id="3" name="TextBox 2">
+            <a:extLst>
+              <a:ext uri="{FF2B5EF4-FFF2-40B4-BE49-F238E27FC236}">
+                <a16:creationId xmlns:a16="http://schemas.microsoft.com/office/drawing/2014/main" id="{0D02719F-88F7-36A3-1610-027AD0736656}"/>
+              </a:ext>
+            </a:extLst>
+          </p:cNvPr>
+          <p:cNvSpPr txBox="1"/>
+          <p:nvPr/>
+        </p:nvSpPr>
+        <p:spPr>
+          <a:xfrm>
+            <a:off x="217714" y="255046"/>
+            <a:ext cx="11756571" cy="2756011"/>
+          </a:xfrm>
+          <a:prstGeom prst="rect">
+            <a:avLst/>
+          </a:prstGeom>
+          <a:noFill/>
+        </p:spPr>
+        <p:txBody>
+          <a:bodyPr wrap="square">
+            <a:spAutoFit/>
+          </a:bodyPr>
+          <a:lstStyle/>
+          <a:p>
+            <a:pPr>
+              <a:lnSpc>
+                <a:spcPct val="150000"/>
+              </a:lnSpc>
+              <a:buNone/>
+            </a:pPr>
+            <a:r>
+              <a:rPr lang="en-US" altLang="en-US" sz="1300">
+                <a:latin typeface="Arial" panose="020B0604020202020204" pitchFamily="34" charset="0"/>
+              </a:rPr>
+              <a:t>resources\views\admin\child-category\create.blade.php</a:t>
+            </a:r>
+          </a:p>
+          <a:p>
+            <a:pPr>
+              <a:lnSpc>
+                <a:spcPct val="150000"/>
+              </a:lnSpc>
+              <a:buNone/>
+            </a:pPr>
+            <a:endParaRPr kumimoji="0" lang="az-Latn-AZ" altLang="en-US" sz="1300" b="0" i="0" u="none" strike="noStrike" cap="none" normalizeH="0" baseline="0">
+              <a:ln>
+                <a:noFill/>
+              </a:ln>
+              <a:solidFill>
+                <a:schemeClr val="tx1"/>
+              </a:solidFill>
+              <a:effectLst/>
+              <a:latin typeface="Arial" panose="020B0604020202020204" pitchFamily="34" charset="0"/>
+            </a:endParaRPr>
+          </a:p>
+          <a:p>
+            <a:pPr>
+              <a:lnSpc>
+                <a:spcPct val="150000"/>
+              </a:lnSpc>
+              <a:buNone/>
+            </a:pPr>
+            <a:endParaRPr lang="az-Latn-AZ" altLang="en-US" sz="1300">
+              <a:latin typeface="Arial" panose="020B0604020202020204" pitchFamily="34" charset="0"/>
+            </a:endParaRPr>
+          </a:p>
+          <a:p>
+            <a:pPr>
+              <a:lnSpc>
+                <a:spcPct val="150000"/>
+              </a:lnSpc>
+              <a:buNone/>
+            </a:pPr>
+            <a:endParaRPr kumimoji="0" lang="az-Latn-AZ" altLang="en-US" sz="1300" b="0" i="0" u="none" strike="noStrike" cap="none" normalizeH="0" baseline="0">
+              <a:ln>
+                <a:noFill/>
+              </a:ln>
+              <a:solidFill>
+                <a:schemeClr val="tx1"/>
+              </a:solidFill>
+              <a:effectLst/>
+              <a:latin typeface="Arial" panose="020B0604020202020204" pitchFamily="34" charset="0"/>
+            </a:endParaRPr>
+          </a:p>
+          <a:p>
+            <a:pPr>
+              <a:lnSpc>
+                <a:spcPct val="150000"/>
+              </a:lnSpc>
+              <a:buNone/>
+            </a:pPr>
+            <a:endParaRPr kumimoji="0" lang="en-US" altLang="en-US" sz="1300" b="0" i="0" u="none" strike="noStrike" cap="none" normalizeH="0" baseline="0">
+              <a:ln>
+                <a:noFill/>
+              </a:ln>
+              <a:solidFill>
+                <a:schemeClr val="tx1"/>
+              </a:solidFill>
+              <a:effectLst/>
+              <a:latin typeface="Arial" panose="020B0604020202020204" pitchFamily="34" charset="0"/>
+            </a:endParaRPr>
+          </a:p>
+          <a:p>
+            <a:pPr>
+              <a:lnSpc>
+                <a:spcPct val="150000"/>
+              </a:lnSpc>
+              <a:buNone/>
+            </a:pPr>
+            <a:r>
+              <a:rPr kumimoji="0" lang="az-Latn-AZ" altLang="en-US" sz="1300" b="0" i="0" u="none" strike="noStrike" cap="none" normalizeH="0" baseline="0">
+                <a:ln>
+                  <a:noFill/>
+                </a:ln>
+                <a:solidFill>
+                  <a:schemeClr val="tx1"/>
+                </a:solidFill>
+                <a:effectLst/>
+                <a:latin typeface="Arial" panose="020B0604020202020204" pitchFamily="34" charset="0"/>
+              </a:rPr>
+              <a:t>Dəyişiklikləri xırda-xırda edirik.</a:t>
+            </a:r>
+          </a:p>
+          <a:p>
+            <a:pPr>
+              <a:lnSpc>
+                <a:spcPct val="150000"/>
+              </a:lnSpc>
+              <a:buNone/>
+            </a:pPr>
+            <a:endParaRPr lang="az-Latn-AZ" altLang="en-US" sz="1300">
+              <a:latin typeface="Arial" panose="020B0604020202020204" pitchFamily="34" charset="0"/>
+            </a:endParaRPr>
+          </a:p>
+          <a:p>
+            <a:pPr>
+              <a:lnSpc>
+                <a:spcPct val="150000"/>
+              </a:lnSpc>
+              <a:buNone/>
+            </a:pPr>
+            <a:r>
+              <a:rPr kumimoji="0" lang="az-Latn-AZ" altLang="en-US" sz="1300" b="0" i="0" u="none" strike="noStrike" cap="none" normalizeH="0" baseline="0">
+                <a:ln>
+                  <a:noFill/>
+                </a:ln>
+                <a:solidFill>
+                  <a:schemeClr val="tx1"/>
+                </a:solidFill>
+                <a:effectLst/>
+                <a:latin typeface="Arial" panose="020B0604020202020204" pitchFamily="34" charset="0"/>
+              </a:rPr>
+              <a:t>Məqsədimiz</a:t>
+            </a:r>
+            <a:r>
+              <a:rPr lang="az-Latn-AZ" altLang="en-US" sz="1300">
+                <a:latin typeface="Arial" panose="020B0604020202020204" pitchFamily="34" charset="0"/>
+              </a:rPr>
+              <a:t>, </a:t>
+            </a:r>
+            <a:r>
+              <a:rPr lang="az-Latn-AZ" altLang="en-US" sz="1300" b="1">
+                <a:latin typeface="Arial" panose="020B0604020202020204" pitchFamily="34" charset="0"/>
+              </a:rPr>
+              <a:t>kateqoriyalara</a:t>
+            </a:r>
+            <a:r>
+              <a:rPr lang="az-Latn-AZ" altLang="en-US" sz="1300">
+                <a:latin typeface="Arial" panose="020B0604020202020204" pitchFamily="34" charset="0"/>
+              </a:rPr>
+              <a:t> uyğun gələn </a:t>
+            </a:r>
+            <a:r>
+              <a:rPr lang="az-Latn-AZ" altLang="en-US" sz="1300" b="1">
+                <a:latin typeface="Arial" panose="020B0604020202020204" pitchFamily="34" charset="0"/>
+              </a:rPr>
+              <a:t>sub kateqoriyaları</a:t>
+            </a:r>
+          </a:p>
+          <a:p>
+            <a:pPr>
+              <a:lnSpc>
+                <a:spcPct val="150000"/>
+              </a:lnSpc>
+              <a:buNone/>
+            </a:pPr>
+            <a:r>
+              <a:rPr lang="az-Latn-AZ" altLang="en-US" sz="1300">
+                <a:latin typeface="Arial" panose="020B0604020202020204" pitchFamily="34" charset="0"/>
+              </a:rPr>
+              <a:t>əldə etmək onları göstərmək olacaq.</a:t>
+            </a:r>
+            <a:endParaRPr kumimoji="0" lang="en-US" altLang="en-US" sz="1300" b="0" i="0" u="none" strike="noStrike" cap="none" normalizeH="0" baseline="0">
+              <a:ln>
+                <a:noFill/>
+              </a:ln>
+              <a:solidFill>
+                <a:schemeClr val="tx1"/>
+              </a:solidFill>
+              <a:effectLst/>
+              <a:latin typeface="Arial" panose="020B0604020202020204" pitchFamily="34" charset="0"/>
+            </a:endParaRPr>
+          </a:p>
+        </p:txBody>
+      </p:sp>
+      <p:pic>
+        <p:nvPicPr>
+          <p:cNvPr id="4" name="Picture 3">
+            <a:extLst>
+              <a:ext uri="{FF2B5EF4-FFF2-40B4-BE49-F238E27FC236}">
+                <a16:creationId xmlns:a16="http://schemas.microsoft.com/office/drawing/2014/main" id="{D3356333-3DD9-1004-3FA6-2B0965F39ACE}"/>
+              </a:ext>
+            </a:extLst>
+          </p:cNvPr>
+          <p:cNvPicPr>
+            <a:picLocks noChangeAspect="1"/>
+          </p:cNvPicPr>
+          <p:nvPr/>
+        </p:nvPicPr>
+        <p:blipFill>
+          <a:blip r:embed="rId2"/>
+          <a:stretch>
+            <a:fillRect/>
+          </a:stretch>
+        </p:blipFill>
+        <p:spPr>
+          <a:xfrm>
+            <a:off x="5437283" y="0"/>
+            <a:ext cx="6754717" cy="6858000"/>
+          </a:xfrm>
+          <a:prstGeom prst="rect">
+            <a:avLst/>
+          </a:prstGeom>
+        </p:spPr>
+      </p:pic>
+    </p:spTree>
+    <p:extLst>
+      <p:ext uri="{BB962C8B-B14F-4D97-AF65-F5344CB8AC3E}">
+        <p14:creationId xmlns:p14="http://schemas.microsoft.com/office/powerpoint/2010/main" val="2344860258"/>
       </p:ext>
     </p:extLst>
   </p:cSld>

--- a/.lessons/56 Category, Subcategory and Child Category Setup/14 Child Category- working with child category (part - 1)/1.pptx
+++ b/.lessons/56 Category, Subcategory and Child Category Setup/14 Child Category- working with child category (part - 1)/1.pptx
@@ -23,8 +23,9 @@
     <p:sldId id="429" r:id="rId17"/>
     <p:sldId id="430" r:id="rId18"/>
     <p:sldId id="422" r:id="rId19"/>
-    <p:sldId id="400" r:id="rId20"/>
-    <p:sldId id="431" r:id="rId21"/>
+    <p:sldId id="432" r:id="rId20"/>
+    <p:sldId id="433" r:id="rId21"/>
+    <p:sldId id="431" r:id="rId22"/>
   </p:sldIdLst>
   <p:sldSz cx="12192000" cy="6858000"/>
   <p:notesSz cx="6858000" cy="9144000"/>
@@ -278,7 +279,7 @@
           <a:p>
             <a:fld id="{3E102D2E-813C-461C-9963-687A650C48C0}" type="datetimeFigureOut">
               <a:rPr lang="en-US" smtClean="0"/>
-              <a:t>8/24/2025</a:t>
+              <a:t>8/27/2025</a:t>
             </a:fld>
             <a:endParaRPr lang="en-US"/>
           </a:p>
@@ -476,7 +477,7 @@
           <a:p>
             <a:fld id="{3E102D2E-813C-461C-9963-687A650C48C0}" type="datetimeFigureOut">
               <a:rPr lang="en-US" smtClean="0"/>
-              <a:t>8/24/2025</a:t>
+              <a:t>8/27/2025</a:t>
             </a:fld>
             <a:endParaRPr lang="en-US"/>
           </a:p>
@@ -684,7 +685,7 @@
           <a:p>
             <a:fld id="{3E102D2E-813C-461C-9963-687A650C48C0}" type="datetimeFigureOut">
               <a:rPr lang="en-US" smtClean="0"/>
-              <a:t>8/24/2025</a:t>
+              <a:t>8/27/2025</a:t>
             </a:fld>
             <a:endParaRPr lang="en-US"/>
           </a:p>
@@ -882,7 +883,7 @@
           <a:p>
             <a:fld id="{3E102D2E-813C-461C-9963-687A650C48C0}" type="datetimeFigureOut">
               <a:rPr lang="en-US" smtClean="0"/>
-              <a:t>8/24/2025</a:t>
+              <a:t>8/27/2025</a:t>
             </a:fld>
             <a:endParaRPr lang="en-US"/>
           </a:p>
@@ -1157,7 +1158,7 @@
           <a:p>
             <a:fld id="{3E102D2E-813C-461C-9963-687A650C48C0}" type="datetimeFigureOut">
               <a:rPr lang="en-US" smtClean="0"/>
-              <a:t>8/24/2025</a:t>
+              <a:t>8/27/2025</a:t>
             </a:fld>
             <a:endParaRPr lang="en-US"/>
           </a:p>
@@ -1422,7 +1423,7 @@
           <a:p>
             <a:fld id="{3E102D2E-813C-461C-9963-687A650C48C0}" type="datetimeFigureOut">
               <a:rPr lang="en-US" smtClean="0"/>
-              <a:t>8/24/2025</a:t>
+              <a:t>8/27/2025</a:t>
             </a:fld>
             <a:endParaRPr lang="en-US"/>
           </a:p>
@@ -1834,7 +1835,7 @@
           <a:p>
             <a:fld id="{3E102D2E-813C-461C-9963-687A650C48C0}" type="datetimeFigureOut">
               <a:rPr lang="en-US" smtClean="0"/>
-              <a:t>8/24/2025</a:t>
+              <a:t>8/27/2025</a:t>
             </a:fld>
             <a:endParaRPr lang="en-US"/>
           </a:p>
@@ -1975,7 +1976,7 @@
           <a:p>
             <a:fld id="{3E102D2E-813C-461C-9963-687A650C48C0}" type="datetimeFigureOut">
               <a:rPr lang="en-US" smtClean="0"/>
-              <a:t>8/24/2025</a:t>
+              <a:t>8/27/2025</a:t>
             </a:fld>
             <a:endParaRPr lang="en-US"/>
           </a:p>
@@ -2088,7 +2089,7 @@
           <a:p>
             <a:fld id="{3E102D2E-813C-461C-9963-687A650C48C0}" type="datetimeFigureOut">
               <a:rPr lang="en-US" smtClean="0"/>
-              <a:t>8/24/2025</a:t>
+              <a:t>8/27/2025</a:t>
             </a:fld>
             <a:endParaRPr lang="en-US"/>
           </a:p>
@@ -2399,7 +2400,7 @@
           <a:p>
             <a:fld id="{3E102D2E-813C-461C-9963-687A650C48C0}" type="datetimeFigureOut">
               <a:rPr lang="en-US" smtClean="0"/>
-              <a:t>8/24/2025</a:t>
+              <a:t>8/27/2025</a:t>
             </a:fld>
             <a:endParaRPr lang="en-US"/>
           </a:p>
@@ -2687,7 +2688,7 @@
           <a:p>
             <a:fld id="{3E102D2E-813C-461C-9963-687A650C48C0}" type="datetimeFigureOut">
               <a:rPr lang="en-US" smtClean="0"/>
-              <a:t>8/24/2025</a:t>
+              <a:t>8/27/2025</a:t>
             </a:fld>
             <a:endParaRPr lang="en-US"/>
           </a:p>
@@ -2928,7 +2929,7 @@
           <a:p>
             <a:fld id="{3E102D2E-813C-461C-9963-687A650C48C0}" type="datetimeFigureOut">
               <a:rPr lang="en-US" smtClean="0"/>
-              <a:t>8/24/2025</a:t>
+              <a:t>8/27/2025</a:t>
             </a:fld>
             <a:endParaRPr lang="en-US"/>
           </a:p>
@@ -5275,7 +5276,7 @@
         <p:cNvPr id="1" name="">
           <a:extLst>
             <a:ext uri="{FF2B5EF4-FFF2-40B4-BE49-F238E27FC236}">
-              <a16:creationId xmlns:a16="http://schemas.microsoft.com/office/drawing/2014/main" id="{ECE25D7D-A080-F22B-7E8D-36EC827289A1}"/>
+              <a16:creationId xmlns:a16="http://schemas.microsoft.com/office/drawing/2014/main" id="{633A5E91-7740-38D2-4162-DADCBB962748}"/>
             </a:ext>
           </a:extLst>
         </p:cNvPr>
@@ -5295,7 +5296,7 @@
           <p:cNvPr id="3" name="TextBox 2">
             <a:extLst>
               <a:ext uri="{FF2B5EF4-FFF2-40B4-BE49-F238E27FC236}">
-                <a16:creationId xmlns:a16="http://schemas.microsoft.com/office/drawing/2014/main" id="{E33F16A3-A6E8-401E-847B-09570DC6E4CB}"/>
+                <a16:creationId xmlns:a16="http://schemas.microsoft.com/office/drawing/2014/main" id="{D66B5BA9-B909-A52F-F966-A2B5C425E3DA}"/>
               </a:ext>
             </a:extLst>
           </p:cNvPr>
@@ -5343,7 +5344,7 @@
     </p:spTree>
     <p:extLst>
       <p:ext uri="{BB962C8B-B14F-4D97-AF65-F5344CB8AC3E}">
-        <p14:creationId xmlns:p14="http://schemas.microsoft.com/office/powerpoint/2010/main" val="3095838342"/>
+        <p14:creationId xmlns:p14="http://schemas.microsoft.com/office/powerpoint/2010/main" val="1818835144"/>
       </p:ext>
     </p:extLst>
   </p:cSld>
@@ -5473,6 +5474,92 @@
 </file>
 
 <file path=ppt/slides/slide20.xml><?xml version="1.0" encoding="utf-8"?>
+<p:sld xmlns:a="http://schemas.openxmlformats.org/drawingml/2006/main" xmlns:r="http://schemas.openxmlformats.org/officeDocument/2006/relationships" xmlns:p="http://schemas.openxmlformats.org/presentationml/2006/main">
+  <p:cSld>
+    <p:spTree>
+      <p:nvGrpSpPr>
+        <p:cNvPr id="1" name="">
+          <a:extLst>
+            <a:ext uri="{FF2B5EF4-FFF2-40B4-BE49-F238E27FC236}">
+              <a16:creationId xmlns:a16="http://schemas.microsoft.com/office/drawing/2014/main" id="{0AA00F42-5DF8-3B0B-6FAA-A53124E85AFF}"/>
+            </a:ext>
+          </a:extLst>
+        </p:cNvPr>
+        <p:cNvGrpSpPr/>
+        <p:nvPr/>
+      </p:nvGrpSpPr>
+      <p:grpSpPr>
+        <a:xfrm>
+          <a:off x="0" y="0"/>
+          <a:ext cx="0" cy="0"/>
+          <a:chOff x="0" y="0"/>
+          <a:chExt cx="0" cy="0"/>
+        </a:xfrm>
+      </p:grpSpPr>
+      <p:sp>
+        <p:nvSpPr>
+          <p:cNvPr id="3" name="TextBox 2">
+            <a:extLst>
+              <a:ext uri="{FF2B5EF4-FFF2-40B4-BE49-F238E27FC236}">
+                <a16:creationId xmlns:a16="http://schemas.microsoft.com/office/drawing/2014/main" id="{71A34ACD-A6BA-7E45-FC6F-1ECD3D5632D0}"/>
+              </a:ext>
+            </a:extLst>
+          </p:cNvPr>
+          <p:cNvSpPr txBox="1"/>
+          <p:nvPr/>
+        </p:nvSpPr>
+        <p:spPr>
+          <a:xfrm>
+            <a:off x="217714" y="255046"/>
+            <a:ext cx="11756571" cy="355354"/>
+          </a:xfrm>
+          <a:prstGeom prst="rect">
+            <a:avLst/>
+          </a:prstGeom>
+          <a:noFill/>
+        </p:spPr>
+        <p:txBody>
+          <a:bodyPr wrap="square">
+            <a:spAutoFit/>
+          </a:bodyPr>
+          <a:lstStyle/>
+          <a:p>
+            <a:pPr>
+              <a:lnSpc>
+                <a:spcPct val="150000"/>
+              </a:lnSpc>
+              <a:buNone/>
+            </a:pPr>
+            <a:r>
+              <a:rPr kumimoji="0" lang="en-US" altLang="en-US" sz="1300" b="0" i="0" u="none" strike="noStrike" cap="none" normalizeH="0" baseline="0">
+                <a:ln>
+                  <a:noFill/>
+                </a:ln>
+                <a:solidFill>
+                  <a:schemeClr val="tx1"/>
+                </a:solidFill>
+                <a:effectLst/>
+                <a:latin typeface="Arial" panose="020B0604020202020204" pitchFamily="34" charset="0"/>
+              </a:rPr>
+              <a:t>.</a:t>
+            </a:r>
+          </a:p>
+        </p:txBody>
+      </p:sp>
+    </p:spTree>
+    <p:extLst>
+      <p:ext uri="{BB962C8B-B14F-4D97-AF65-F5344CB8AC3E}">
+        <p14:creationId xmlns:p14="http://schemas.microsoft.com/office/powerpoint/2010/main" val="764488159"/>
+      </p:ext>
+    </p:extLst>
+  </p:cSld>
+  <p:clrMapOvr>
+    <a:masterClrMapping/>
+  </p:clrMapOvr>
+</p:sld>
+</file>
+
+<file path=ppt/slides/slide21.xml><?xml version="1.0" encoding="utf-8"?>
 <p:sld xmlns:a="http://schemas.openxmlformats.org/drawingml/2006/main" xmlns:r="http://schemas.openxmlformats.org/officeDocument/2006/relationships" xmlns:p="http://schemas.openxmlformats.org/presentationml/2006/main">
   <p:cSld>
     <p:spTree>
